--- a/exports/pptx/lessons/middle-module-07-eleven-multiplication/day-09-project-session.pptx
+++ b/exports/pptx/lessons/middle-module-07-eleven-multiplication/day-09-project-session.pptx
@@ -17,9 +17,13 @@
     <p:sldId id="265" r:id="rId11"/>
     <p:sldId id="266" r:id="rId12"/>
     <p:sldId id="267" r:id="rId13"/>
+    <p:sldId id="268" r:id="rId14"/>
+    <p:sldId id="269" r:id="rId15"/>
+    <p:sldId id="270" r:id="rId16"/>
+    <p:sldId id="271" r:id="rId17"/>
   </p:sldIdLst>
   <p:notesMasterIdLst>
-    <p:notesMasterId r:id="rId14"/>
+    <p:notesMasterId r:id="rId18"/>
   </p:notesMasterIdLst>
   <p:sldSz cx="9144000" cy="5143500"/>
   <p:notesSz cx="5143500" cy="9144000"/>
@@ -801,6 +805,358 @@
             <a:fld id="{F7021451-1387-4CA6-816F-3879F97B5CBC}" type="slidenum">
               <a:rPr lang="en-US"/>
               <a:t>12</a:t>
+            </a:fld>
+            <a:endParaRPr lang="en-US"/>
+          </a:p>
+        </p:txBody>
+      </p:sp>
+    </p:spTree>
+    <p:extLst>
+      <p:ext uri="{BB962C8B-B14F-4D97-AF65-F5344CB8AC3E}">
+        <p14:creationId xmlns:p14="http://schemas.microsoft.com/office/powerpoint/2010/main" val="1024086991"/>
+      </p:ext>
+    </p:extLst>
+  </p:cSld>
+  <p:clrMapOvr>
+    <a:masterClrMapping/>
+  </p:clrMapOvr>
+</p:notes>
+</file>
+
+<file path=ppt/notesSlides/notesSlide13.xml><?xml version="1.0" encoding="utf-8"?>
+<p:notes xmlns:a="http://schemas.openxmlformats.org/drawingml/2006/main" xmlns:r="http://schemas.openxmlformats.org/officeDocument/2006/relationships" xmlns:p="http://schemas.openxmlformats.org/presentationml/2006/main">
+  <p:cSld>
+    <p:spTree>
+      <p:nvGrpSpPr>
+        <p:cNvPr id="1" name=""/>
+        <p:cNvGrpSpPr/>
+        <p:nvPr/>
+      </p:nvGrpSpPr>
+      <p:grpSpPr>
+        <a:xfrm>
+          <a:off x="0" y="0"/>
+          <a:ext cx="0" cy="0"/>
+          <a:chOff x="0" y="0"/>
+          <a:chExt cx="0" cy="0"/>
+        </a:xfrm>
+      </p:grpSpPr>
+      <p:sp>
+        <p:nvSpPr>
+          <p:cNvPr id="2" name="Slide Image Placeholder 1"/>
+          <p:cNvSpPr>
+            <a:spLocks noGrp="1" noRot="1" noChangeAspect="1"/>
+          </p:cNvSpPr>
+          <p:nvPr>
+            <p:ph type="sldImg"/>
+          </p:nvPr>
+        </p:nvSpPr>
+        <p:spPr/>
+      </p:sp>
+      <p:sp>
+        <p:nvSpPr>
+          <p:cNvPr id="3" name="Notes Placeholder 2"/>
+          <p:cNvSpPr>
+            <a:spLocks noGrp="1"/>
+          </p:cNvSpPr>
+          <p:nvPr>
+            <p:ph type="body" idx="1"/>
+          </p:nvPr>
+        </p:nvSpPr>
+        <p:spPr/>
+        <p:txBody>
+          <a:bodyPr/>
+          <a:lstStyle/>
+          <a:p>
+            <a:r>
+              <a:rPr lang="en-US" dirty="0"/>
+              <a:t/>
+            </a:r>
+            <a:endParaRPr lang="en-US" dirty="0"/>
+          </a:p>
+        </p:txBody>
+      </p:sp>
+      <p:sp>
+        <p:nvSpPr>
+          <p:cNvPr id="4" name="Slide Number Placeholder 3"/>
+          <p:cNvSpPr>
+            <a:spLocks noGrp="1"/>
+          </p:cNvSpPr>
+          <p:nvPr>
+            <p:ph type="sldNum" sz="quarter" idx="10"/>
+          </p:nvPr>
+        </p:nvSpPr>
+        <p:spPr/>
+        <p:txBody>
+          <a:bodyPr/>
+          <a:lstStyle/>
+          <a:p>
+            <a:fld id="{F7021451-1387-4CA6-816F-3879F97B5CBC}" type="slidenum">
+              <a:rPr lang="en-US"/>
+              <a:t>13</a:t>
+            </a:fld>
+            <a:endParaRPr lang="en-US"/>
+          </a:p>
+        </p:txBody>
+      </p:sp>
+    </p:spTree>
+    <p:extLst>
+      <p:ext uri="{BB962C8B-B14F-4D97-AF65-F5344CB8AC3E}">
+        <p14:creationId xmlns:p14="http://schemas.microsoft.com/office/powerpoint/2010/main" val="1024086991"/>
+      </p:ext>
+    </p:extLst>
+  </p:cSld>
+  <p:clrMapOvr>
+    <a:masterClrMapping/>
+  </p:clrMapOvr>
+</p:notes>
+</file>
+
+<file path=ppt/notesSlides/notesSlide14.xml><?xml version="1.0" encoding="utf-8"?>
+<p:notes xmlns:a="http://schemas.openxmlformats.org/drawingml/2006/main" xmlns:r="http://schemas.openxmlformats.org/officeDocument/2006/relationships" xmlns:p="http://schemas.openxmlformats.org/presentationml/2006/main">
+  <p:cSld>
+    <p:spTree>
+      <p:nvGrpSpPr>
+        <p:cNvPr id="1" name=""/>
+        <p:cNvGrpSpPr/>
+        <p:nvPr/>
+      </p:nvGrpSpPr>
+      <p:grpSpPr>
+        <a:xfrm>
+          <a:off x="0" y="0"/>
+          <a:ext cx="0" cy="0"/>
+          <a:chOff x="0" y="0"/>
+          <a:chExt cx="0" cy="0"/>
+        </a:xfrm>
+      </p:grpSpPr>
+      <p:sp>
+        <p:nvSpPr>
+          <p:cNvPr id="2" name="Slide Image Placeholder 1"/>
+          <p:cNvSpPr>
+            <a:spLocks noGrp="1" noRot="1" noChangeAspect="1"/>
+          </p:cNvSpPr>
+          <p:nvPr>
+            <p:ph type="sldImg"/>
+          </p:nvPr>
+        </p:nvSpPr>
+        <p:spPr/>
+      </p:sp>
+      <p:sp>
+        <p:nvSpPr>
+          <p:cNvPr id="3" name="Notes Placeholder 2"/>
+          <p:cNvSpPr>
+            <a:spLocks noGrp="1"/>
+          </p:cNvSpPr>
+          <p:nvPr>
+            <p:ph type="body" idx="1"/>
+          </p:nvPr>
+        </p:nvSpPr>
+        <p:spPr/>
+        <p:txBody>
+          <a:bodyPr/>
+          <a:lstStyle/>
+          <a:p>
+            <a:r>
+              <a:rPr lang="en-US" dirty="0"/>
+              <a:t/>
+            </a:r>
+            <a:endParaRPr lang="en-US" dirty="0"/>
+          </a:p>
+        </p:txBody>
+      </p:sp>
+      <p:sp>
+        <p:nvSpPr>
+          <p:cNvPr id="4" name="Slide Number Placeholder 3"/>
+          <p:cNvSpPr>
+            <a:spLocks noGrp="1"/>
+          </p:cNvSpPr>
+          <p:nvPr>
+            <p:ph type="sldNum" sz="quarter" idx="10"/>
+          </p:nvPr>
+        </p:nvSpPr>
+        <p:spPr/>
+        <p:txBody>
+          <a:bodyPr/>
+          <a:lstStyle/>
+          <a:p>
+            <a:fld id="{F7021451-1387-4CA6-816F-3879F97B5CBC}" type="slidenum">
+              <a:rPr lang="en-US"/>
+              <a:t>14</a:t>
+            </a:fld>
+            <a:endParaRPr lang="en-US"/>
+          </a:p>
+        </p:txBody>
+      </p:sp>
+    </p:spTree>
+    <p:extLst>
+      <p:ext uri="{BB962C8B-B14F-4D97-AF65-F5344CB8AC3E}">
+        <p14:creationId xmlns:p14="http://schemas.microsoft.com/office/powerpoint/2010/main" val="1024086991"/>
+      </p:ext>
+    </p:extLst>
+  </p:cSld>
+  <p:clrMapOvr>
+    <a:masterClrMapping/>
+  </p:clrMapOvr>
+</p:notes>
+</file>
+
+<file path=ppt/notesSlides/notesSlide15.xml><?xml version="1.0" encoding="utf-8"?>
+<p:notes xmlns:a="http://schemas.openxmlformats.org/drawingml/2006/main" xmlns:r="http://schemas.openxmlformats.org/officeDocument/2006/relationships" xmlns:p="http://schemas.openxmlformats.org/presentationml/2006/main">
+  <p:cSld>
+    <p:spTree>
+      <p:nvGrpSpPr>
+        <p:cNvPr id="1" name=""/>
+        <p:cNvGrpSpPr/>
+        <p:nvPr/>
+      </p:nvGrpSpPr>
+      <p:grpSpPr>
+        <a:xfrm>
+          <a:off x="0" y="0"/>
+          <a:ext cx="0" cy="0"/>
+          <a:chOff x="0" y="0"/>
+          <a:chExt cx="0" cy="0"/>
+        </a:xfrm>
+      </p:grpSpPr>
+      <p:sp>
+        <p:nvSpPr>
+          <p:cNvPr id="2" name="Slide Image Placeholder 1"/>
+          <p:cNvSpPr>
+            <a:spLocks noGrp="1" noRot="1" noChangeAspect="1"/>
+          </p:cNvSpPr>
+          <p:nvPr>
+            <p:ph type="sldImg"/>
+          </p:nvPr>
+        </p:nvSpPr>
+        <p:spPr/>
+      </p:sp>
+      <p:sp>
+        <p:nvSpPr>
+          <p:cNvPr id="3" name="Notes Placeholder 2"/>
+          <p:cNvSpPr>
+            <a:spLocks noGrp="1"/>
+          </p:cNvSpPr>
+          <p:nvPr>
+            <p:ph type="body" idx="1"/>
+          </p:nvPr>
+        </p:nvSpPr>
+        <p:spPr/>
+        <p:txBody>
+          <a:bodyPr/>
+          <a:lstStyle/>
+          <a:p>
+            <a:r>
+              <a:rPr lang="en-US" dirty="0"/>
+              <a:t/>
+            </a:r>
+            <a:endParaRPr lang="en-US" dirty="0"/>
+          </a:p>
+        </p:txBody>
+      </p:sp>
+      <p:sp>
+        <p:nvSpPr>
+          <p:cNvPr id="4" name="Slide Number Placeholder 3"/>
+          <p:cNvSpPr>
+            <a:spLocks noGrp="1"/>
+          </p:cNvSpPr>
+          <p:nvPr>
+            <p:ph type="sldNum" sz="quarter" idx="10"/>
+          </p:nvPr>
+        </p:nvSpPr>
+        <p:spPr/>
+        <p:txBody>
+          <a:bodyPr/>
+          <a:lstStyle/>
+          <a:p>
+            <a:fld id="{F7021451-1387-4CA6-816F-3879F97B5CBC}" type="slidenum">
+              <a:rPr lang="en-US"/>
+              <a:t>15</a:t>
+            </a:fld>
+            <a:endParaRPr lang="en-US"/>
+          </a:p>
+        </p:txBody>
+      </p:sp>
+    </p:spTree>
+    <p:extLst>
+      <p:ext uri="{BB962C8B-B14F-4D97-AF65-F5344CB8AC3E}">
+        <p14:creationId xmlns:p14="http://schemas.microsoft.com/office/powerpoint/2010/main" val="1024086991"/>
+      </p:ext>
+    </p:extLst>
+  </p:cSld>
+  <p:clrMapOvr>
+    <a:masterClrMapping/>
+  </p:clrMapOvr>
+</p:notes>
+</file>
+
+<file path=ppt/notesSlides/notesSlide16.xml><?xml version="1.0" encoding="utf-8"?>
+<p:notes xmlns:a="http://schemas.openxmlformats.org/drawingml/2006/main" xmlns:r="http://schemas.openxmlformats.org/officeDocument/2006/relationships" xmlns:p="http://schemas.openxmlformats.org/presentationml/2006/main">
+  <p:cSld>
+    <p:spTree>
+      <p:nvGrpSpPr>
+        <p:cNvPr id="1" name=""/>
+        <p:cNvGrpSpPr/>
+        <p:nvPr/>
+      </p:nvGrpSpPr>
+      <p:grpSpPr>
+        <a:xfrm>
+          <a:off x="0" y="0"/>
+          <a:ext cx="0" cy="0"/>
+          <a:chOff x="0" y="0"/>
+          <a:chExt cx="0" cy="0"/>
+        </a:xfrm>
+      </p:grpSpPr>
+      <p:sp>
+        <p:nvSpPr>
+          <p:cNvPr id="2" name="Slide Image Placeholder 1"/>
+          <p:cNvSpPr>
+            <a:spLocks noGrp="1" noRot="1" noChangeAspect="1"/>
+          </p:cNvSpPr>
+          <p:nvPr>
+            <p:ph type="sldImg"/>
+          </p:nvPr>
+        </p:nvSpPr>
+        <p:spPr/>
+      </p:sp>
+      <p:sp>
+        <p:nvSpPr>
+          <p:cNvPr id="3" name="Notes Placeholder 2"/>
+          <p:cNvSpPr>
+            <a:spLocks noGrp="1"/>
+          </p:cNvSpPr>
+          <p:nvPr>
+            <p:ph type="body" idx="1"/>
+          </p:nvPr>
+        </p:nvSpPr>
+        <p:spPr/>
+        <p:txBody>
+          <a:bodyPr/>
+          <a:lstStyle/>
+          <a:p>
+            <a:r>
+              <a:rPr lang="en-US" dirty="0"/>
+              <a:t/>
+            </a:r>
+            <a:endParaRPr lang="en-US" dirty="0"/>
+          </a:p>
+        </p:txBody>
+      </p:sp>
+      <p:sp>
+        <p:nvSpPr>
+          <p:cNvPr id="4" name="Slide Number Placeholder 3"/>
+          <p:cNvSpPr>
+            <a:spLocks noGrp="1"/>
+          </p:cNvSpPr>
+          <p:nvPr>
+            <p:ph type="sldNum" sz="quarter" idx="10"/>
+          </p:nvPr>
+        </p:nvSpPr>
+        <p:spPr/>
+        <p:txBody>
+          <a:bodyPr/>
+          <a:lstStyle/>
+          <a:p>
+            <a:fld id="{F7021451-1387-4CA6-816F-3879F97B5CBC}" type="slidenum">
+              <a:rPr lang="en-US"/>
+              <a:t>16</a:t>
             </a:fld>
             <a:endParaRPr lang="en-US"/>
           </a:p>
@@ -2146,102 +2502,6 @@
         </p:nvSpPr>
         <p:spPr>
           <a:xfrm>
-            <a:off x="406301" y="1223963"/>
-            <a:ext cx="8498026" cy="274290"/>
-          </a:xfrm>
-          <a:prstGeom prst="rect">
-            <a:avLst/>
-          </a:prstGeom>
-          <a:noFill/>
-          <a:ln/>
-        </p:spPr>
-        <p:txBody>
-          <a:bodyPr wrap="square" lIns="0" tIns="0" rIns="0" bIns="0" rtlCol="0" anchor="t"/>
-          <a:lstStyle/>
-          <a:p>
-            <a:pPr algn="l" indent="0" marL="0">
-              <a:lnSpc>
-                <a:spcPts val="2160"/>
-              </a:lnSpc>
-              <a:spcBef>
-                <a:spcPts val="600"/>
-              </a:spcBef>
-              <a:spcAft>
-                <a:spcPts val="800"/>
-              </a:spcAft>
-              <a:buNone/>
-            </a:pPr>
-            <a:r>
-              <a:rPr lang="en-US" sz="1800" b="1" dirty="0">
-                <a:solidFill>
-                  <a:srgbClr val="FE4447"/>
-                </a:solidFill>
-                <a:latin typeface="Georgia" pitchFamily="34" charset="0"/>
-                <a:ea typeface="Georgia" pitchFamily="34" charset="-122"/>
-                <a:cs typeface="Georgia" pitchFamily="34" charset="-120"/>
-              </a:rPr>
-              <a:t>Learning objective</a:t>
-            </a:r>
-            <a:endParaRPr lang="en-US" sz="1800" dirty="0"/>
-          </a:p>
-        </p:txBody>
-      </p:sp>
-      <p:sp>
-        <p:nvSpPr>
-          <p:cNvPr id="6" name="Text 4"/>
-          <p:cNvSpPr/>
-          <p:nvPr/>
-        </p:nvSpPr>
-        <p:spPr>
-          <a:xfrm>
-            <a:off x="406301" y="1637854"/>
-            <a:ext cx="8498026" cy="426541"/>
-          </a:xfrm>
-          <a:prstGeom prst="rect">
-            <a:avLst/>
-          </a:prstGeom>
-          <a:noFill/>
-          <a:ln/>
-        </p:spPr>
-        <p:txBody>
-          <a:bodyPr wrap="square" lIns="0" tIns="0" rIns="0" bIns="0" rtlCol="0" anchor="t"/>
-          <a:lstStyle/>
-          <a:p>
-            <a:pPr algn="l" indent="0" marL="0">
-              <a:lnSpc>
-                <a:spcPts val="1680"/>
-              </a:lnSpc>
-              <a:spcBef>
-                <a:spcPts val="300"/>
-              </a:spcBef>
-              <a:spcAft>
-                <a:spcPts val="300"/>
-              </a:spcAft>
-              <a:buNone/>
-            </a:pPr>
-            <a:r>
-              <a:rPr lang="en-US" sz="1200" dirty="0">
-                <a:solidFill>
-                  <a:srgbClr val="1C2833"/>
-                </a:solidFill>
-                <a:latin typeface="Arial" pitchFamily="34" charset="0"/>
-                <a:ea typeface="Arial" pitchFamily="34" charset="-122"/>
-                <a:cs typeface="Arial" pitchFamily="34" charset="-120"/>
-              </a:rPr>
-              <a:t>By the end of this lesson, students will complete a mixed-practice drill covering 2-digit ×11, 3-digit ×11, and ×12–×19 problems, and will make substantial progress on their project (video, workbook, or proof poster).</a:t>
-            </a:r>
-            <a:endParaRPr lang="en-US" sz="1200" dirty="0"/>
-          </a:p>
-        </p:txBody>
-      </p:sp>
-      <p:sp>
-        <p:nvSpPr>
-          <p:cNvPr id="7" name="Text 5"/>
-          <p:cNvSpPr/>
-          <p:nvPr/>
-        </p:nvSpPr>
-        <p:spPr>
-          <a:xfrm>
             <a:off x="406301" y="4434929"/>
             <a:ext cx="8498026" cy="213271"/>
           </a:xfrm>
@@ -2386,7 +2646,7 @@
                 <a:ea typeface="Georgia" pitchFamily="34" charset="-122"/>
                 <a:cs typeface="Georgia" pitchFamily="34" charset="-120"/>
               </a:rPr>
-              <a:t>Differentiation</a:t>
+              <a:t>Project session (28 min) (cont.)</a:t>
             </a:r>
             <a:endParaRPr lang="en-US" sz="1800" dirty="0"/>
           </a:p>
@@ -2401,7 +2661,7 @@
         <p:spPr>
           <a:xfrm>
             <a:off x="634901" y="883593"/>
-            <a:ext cx="8102798" cy="525661"/>
+            <a:ext cx="8102798" cy="281880"/>
           </a:xfrm>
           <a:prstGeom prst="rect">
             <a:avLst/>
@@ -2424,26 +2684,6 @@
               <a:buChar char="•"/>
             </a:pPr>
             <a:r>
-              <a:rPr lang="en-US" sz="1200" b="1" dirty="0">
-                <a:solidFill>
-                  <a:srgbClr val="1C2833"/>
-                </a:solidFill>
-                <a:latin typeface="Arial" pitchFamily="34" charset="0"/>
-                <a:ea typeface="Arial" pitchFamily="34" charset="-122"/>
-                <a:cs typeface="Arial" pitchFamily="34" charset="-120"/>
-              </a:rPr>
-              <a:t>Tier up:</a:t>
-            </a:r>
-            <a:pPr algn="l" indent="0" marL="0">
-              <a:lnSpc>
-                <a:spcPts val="1620"/>
-              </a:lnSpc>
-              <a:spcAft>
-                <a:spcPts val="300"/>
-              </a:spcAft>
-              <a:buNone/>
-            </a:pPr>
-            <a:r>
               <a:rPr lang="en-US" sz="1200" dirty="0">
                 <a:solidFill>
                   <a:srgbClr val="1C2833"/>
@@ -2452,51 +2692,7 @@
                 <a:ea typeface="Arial" pitchFamily="34" charset="-122"/>
                 <a:cs typeface="Arial" pitchFamily="34" charset="-120"/>
               </a:rPr>
-              <a:t> Add a "challenge" section to your project: a 4-digit × 11 worked example with cascading carries.</a:t>
-            </a:r>
-            <a:endParaRPr lang="en-US" sz="1200" dirty="0"/>
-          </a:p>
-          <a:p>
-            <a:pPr algn="l" marL="342900" indent="-342900">
-              <a:lnSpc>
-                <a:spcPts val="1620"/>
-              </a:lnSpc>
-              <a:spcAft>
-                <a:spcPts val="300"/>
-              </a:spcAft>
-              <a:buSzPct val="100000"/>
-              <a:buChar char="•"/>
-            </a:pPr>
-            <a:r>
-              <a:rPr lang="en-US" sz="1200" b="1" dirty="0">
-                <a:solidFill>
-                  <a:srgbClr val="1C2833"/>
-                </a:solidFill>
-                <a:latin typeface="Arial" pitchFamily="34" charset="0"/>
-                <a:ea typeface="Arial" pitchFamily="34" charset="-122"/>
-                <a:cs typeface="Arial" pitchFamily="34" charset="-120"/>
-              </a:rPr>
-              <a:t>Tier down:</a:t>
-            </a:r>
-            <a:pPr algn="l" indent="0" marL="0">
-              <a:lnSpc>
-                <a:spcPts val="1620"/>
-              </a:lnSpc>
-              <a:spcAft>
-                <a:spcPts val="300"/>
-              </a:spcAft>
-              <a:buNone/>
-            </a:pPr>
-            <a:r>
-              <a:rPr lang="en-US" sz="1200" dirty="0">
-                <a:solidFill>
-                  <a:srgbClr val="1C2833"/>
-                </a:solidFill>
-                <a:latin typeface="Arial" pitchFamily="34" charset="0"/>
-                <a:ea typeface="Arial" pitchFamily="34" charset="-122"/>
-                <a:cs typeface="Arial" pitchFamily="34" charset="-120"/>
-              </a:rPr>
-              <a:t> Use the workbook template provided. Don't custom-design from scratch today.</a:t>
+              <a:t>Final 5 min: each pair shares their working title and ONE thing they're stuck on. Class offers one suggestion.</a:t>
             </a:r>
             <a:endParaRPr lang="en-US" sz="1200" dirty="0"/>
           </a:p>
@@ -2654,7 +2850,7 @@
                 <a:ea typeface="Georgia" pitchFamily="34" charset="-122"/>
                 <a:cs typeface="Georgia" pitchFamily="34" charset="-120"/>
               </a:rPr>
-              <a:t>Teacher notes</a:t>
+              <a:t>Wrap-up (2 min)</a:t>
             </a:r>
             <a:endParaRPr lang="en-US" sz="1800" dirty="0"/>
           </a:p>
@@ -2668,8 +2864,8 @@
         </p:nvSpPr>
         <p:spPr>
           <a:xfrm>
-            <a:off x="406301" y="870942"/>
-            <a:ext cx="8498026" cy="853083"/>
+            <a:off x="634901" y="883593"/>
+            <a:ext cx="8102798" cy="281880"/>
           </a:xfrm>
           <a:prstGeom prst="rect">
             <a:avLst/>
@@ -2681,28 +2877,26 @@
           <a:bodyPr wrap="square" lIns="0" tIns="0" rIns="0" bIns="0" rtlCol="0" anchor="t"/>
           <a:lstStyle/>
           <a:p>
-            <a:pPr algn="l" indent="0" marL="0">
-              <a:lnSpc>
-                <a:spcPts val="1680"/>
-              </a:lnSpc>
-              <a:spcBef>
-                <a:spcPts val="300"/>
-              </a:spcBef>
-              <a:spcAft>
-                <a:spcPts val="300"/>
-              </a:spcAft>
-              <a:buNone/>
-            </a:pPr>
-            <a:r>
-              <a:rPr lang="en-US" sz="1200" dirty="0">
-                <a:solidFill>
-                  <a:srgbClr val="1C2833"/>
-                </a:solidFill>
-                <a:latin typeface="Arial" pitchFamily="34" charset="0"/>
-                <a:ea typeface="Arial" pitchFamily="34" charset="-122"/>
-                <a:cs typeface="Arial" pitchFamily="34" charset="-120"/>
-              </a:rPr>
-              <a:t>– The project here is intentionally smaller-scope than Module 5's, because the technique is narrower (just ×11 plus the ×12–×19 family) and the assessment is more on the algebra than on the artefact. – Watch for pairs who haven't started by mid-class. Pull them aside; offer the simplest format (proof poster) as a fallback. – The proof poster format is recommended for pairs that struggled on Day 3 — making the algebra public forces them to internalise it.</a:t>
+            <a:pPr algn="l" marL="342900" indent="-342900">
+              <a:lnSpc>
+                <a:spcPts val="1620"/>
+              </a:lnSpc>
+              <a:spcAft>
+                <a:spcPts val="300"/>
+              </a:spcAft>
+              <a:buSzPct val="100000"/>
+              <a:buChar char="•"/>
+            </a:pPr>
+            <a:r>
+              <a:rPr lang="en-US" sz="1200" i="1" dirty="0">
+                <a:solidFill>
+                  <a:srgbClr val="1C2833"/>
+                </a:solidFill>
+                <a:latin typeface="Arial" pitchFamily="34" charset="0"/>
+                <a:ea typeface="Arial" pitchFamily="34" charset="-122"/>
+                <a:cs typeface="Arial" pitchFamily="34" charset="-120"/>
+              </a:rPr>
+              <a:t>"Tomorrow is the final assessment and project share. Bring your finished artefact. Polish, don't restart."</a:t>
             </a:r>
             <a:endParaRPr lang="en-US" sz="1200" dirty="0"/>
           </a:p>
@@ -2860,6 +3054,1242 @@
                 <a:ea typeface="Georgia" pitchFamily="34" charset="-122"/>
                 <a:cs typeface="Georgia" pitchFamily="34" charset="-120"/>
               </a:rPr>
+              <a:t>Student-facing content</a:t>
+            </a:r>
+            <a:endParaRPr lang="en-US" sz="1800" dirty="0"/>
+          </a:p>
+        </p:txBody>
+      </p:sp>
+      <p:sp>
+        <p:nvSpPr>
+          <p:cNvPr id="4" name="Text 2"/>
+          <p:cNvSpPr/>
+          <p:nvPr/>
+        </p:nvSpPr>
+        <p:spPr>
+          <a:xfrm>
+            <a:off x="406301" y="883593"/>
+            <a:ext cx="8331398" cy="1419225"/>
+          </a:xfrm>
+          <a:prstGeom prst="rect">
+            <a:avLst/>
+          </a:prstGeom>
+          <a:solidFill>
+            <a:srgbClr val="F4F8F9"/>
+          </a:solidFill>
+          <a:ln/>
+        </p:spPr>
+        <p:txBody>
+          <a:bodyPr wrap="square" rtlCol="0" anchor="ctr"/>
+          <a:lstStyle/>
+          <a:p>
+            <a:pPr indent="0" marL="0">
+              <a:buNone/>
+            </a:pPr>
+            <a:endParaRPr lang="en-US" dirty="0"/>
+          </a:p>
+        </p:txBody>
+      </p:sp>
+      <p:sp>
+        <p:nvSpPr>
+          <p:cNvPr id="5" name="Shape 3"/>
+          <p:cNvSpPr/>
+          <p:nvPr/>
+        </p:nvSpPr>
+        <p:spPr>
+          <a:xfrm>
+            <a:off x="434876" y="883593"/>
+            <a:ext cx="0" cy="1419225"/>
+          </a:xfrm>
+          <a:prstGeom prst="line">
+            <a:avLst/>
+          </a:prstGeom>
+          <a:noFill/>
+          <a:ln w="57150">
+            <a:solidFill>
+              <a:srgbClr val="FE4447"/>
+            </a:solidFill>
+            <a:prstDash val="solid"/>
+          </a:ln>
+        </p:spPr>
+      </p:sp>
+      <p:sp>
+        <p:nvSpPr>
+          <p:cNvPr id="6" name="Text 4"/>
+          <p:cNvSpPr/>
+          <p:nvPr/>
+        </p:nvSpPr>
+        <p:spPr>
+          <a:xfrm>
+            <a:off x="692051" y="1074093"/>
+            <a:ext cx="7973389" cy="230981"/>
+          </a:xfrm>
+          <a:prstGeom prst="rect">
+            <a:avLst/>
+          </a:prstGeom>
+          <a:noFill/>
+          <a:ln/>
+        </p:spPr>
+        <p:txBody>
+          <a:bodyPr wrap="square" lIns="0" tIns="0" rIns="0" bIns="0" rtlCol="0" anchor="t"/>
+          <a:lstStyle/>
+          <a:p>
+            <a:pPr algn="l" indent="0" marL="0">
+              <a:lnSpc>
+                <a:spcPts val="1820"/>
+              </a:lnSpc>
+              <a:spcBef>
+                <a:spcPts val="300"/>
+              </a:spcBef>
+              <a:spcAft>
+                <a:spcPts val="300"/>
+              </a:spcAft>
+              <a:buNone/>
+            </a:pPr>
+            <a:r>
+              <a:rPr lang="en-US" sz="1300" b="1" i="1" dirty="0">
+                <a:solidFill>
+                  <a:srgbClr val="1C2833"/>
+                </a:solidFill>
+                <a:latin typeface="Georgia" pitchFamily="34" charset="0"/>
+                <a:ea typeface="Georgia" pitchFamily="34" charset="-122"/>
+                <a:cs typeface="Georgia" pitchFamily="34" charset="-120"/>
+              </a:rPr>
+              <a:t>Today's two jobs</a:t>
+            </a:r>
+            <a:endParaRPr lang="en-US" sz="1300" dirty="0"/>
+          </a:p>
+        </p:txBody>
+      </p:sp>
+      <p:sp>
+        <p:nvSpPr>
+          <p:cNvPr id="7" name="Text 5"/>
+          <p:cNvSpPr/>
+          <p:nvPr/>
+        </p:nvSpPr>
+        <p:spPr>
+          <a:xfrm>
+            <a:off x="692051" y="1343174"/>
+            <a:ext cx="7973389" cy="230981"/>
+          </a:xfrm>
+          <a:prstGeom prst="rect">
+            <a:avLst/>
+          </a:prstGeom>
+          <a:noFill/>
+          <a:ln/>
+        </p:spPr>
+        <p:txBody>
+          <a:bodyPr wrap="square" lIns="0" tIns="0" rIns="0" bIns="0" rtlCol="0" anchor="t"/>
+          <a:lstStyle/>
+          <a:p>
+            <a:pPr algn="l" indent="0" marL="0">
+              <a:lnSpc>
+                <a:spcPts val="1820"/>
+              </a:lnSpc>
+              <a:spcBef>
+                <a:spcPts val="300"/>
+              </a:spcBef>
+              <a:spcAft>
+                <a:spcPts val="300"/>
+              </a:spcAft>
+              <a:buNone/>
+            </a:pPr>
+            <a:r>
+              <a:rPr lang="en-US" sz="1300" b="1" i="1" dirty="0">
+                <a:solidFill>
+                  <a:srgbClr val="1C2833"/>
+                </a:solidFill>
+                <a:latin typeface="Georgia" pitchFamily="34" charset="0"/>
+                <a:ea typeface="Georgia" pitchFamily="34" charset="-122"/>
+                <a:cs typeface="Georgia" pitchFamily="34" charset="-120"/>
+              </a:rPr>
+              <a:t>Drill.</a:t>
+            </a:r>
+            <a:pPr algn="l" indent="0" marL="0">
+              <a:lnSpc>
+                <a:spcPts val="1820"/>
+              </a:lnSpc>
+              <a:spcBef>
+                <a:spcPts val="300"/>
+              </a:spcBef>
+              <a:spcAft>
+                <a:spcPts val="300"/>
+              </a:spcAft>
+              <a:buNone/>
+            </a:pPr>
+            <a:r>
+              <a:rPr lang="en-US" sz="1300" dirty="0">
+                <a:solidFill>
+                  <a:srgbClr val="1C2833"/>
+                </a:solidFill>
+                <a:latin typeface="Georgia" pitchFamily="34" charset="0"/>
+                <a:ea typeface="Georgia" pitchFamily="34" charset="-122"/>
+                <a:cs typeface="Georgia" pitchFamily="34" charset="-120"/>
+              </a:rPr>
+              <a:t> 20 mixed problems. Self-assess.</a:t>
+            </a:r>
+            <a:endParaRPr lang="en-US" sz="1300" dirty="0"/>
+          </a:p>
+        </p:txBody>
+      </p:sp>
+      <p:sp>
+        <p:nvSpPr>
+          <p:cNvPr id="8" name="Text 6"/>
+          <p:cNvSpPr/>
+          <p:nvPr/>
+        </p:nvSpPr>
+        <p:spPr>
+          <a:xfrm>
+            <a:off x="692051" y="1612255"/>
+            <a:ext cx="7973389" cy="230981"/>
+          </a:xfrm>
+          <a:prstGeom prst="rect">
+            <a:avLst/>
+          </a:prstGeom>
+          <a:noFill/>
+          <a:ln/>
+        </p:spPr>
+        <p:txBody>
+          <a:bodyPr wrap="square" lIns="0" tIns="0" rIns="0" bIns="0" rtlCol="0" anchor="t"/>
+          <a:lstStyle/>
+          <a:p>
+            <a:pPr algn="l" indent="0" marL="0">
+              <a:lnSpc>
+                <a:spcPts val="1820"/>
+              </a:lnSpc>
+              <a:spcBef>
+                <a:spcPts val="300"/>
+              </a:spcBef>
+              <a:spcAft>
+                <a:spcPts val="300"/>
+              </a:spcAft>
+              <a:buNone/>
+            </a:pPr>
+            <a:r>
+              <a:rPr lang="en-US" sz="1300" b="1" i="1" dirty="0">
+                <a:solidFill>
+                  <a:srgbClr val="1C2833"/>
+                </a:solidFill>
+                <a:latin typeface="Georgia" pitchFamily="34" charset="0"/>
+                <a:ea typeface="Georgia" pitchFamily="34" charset="-122"/>
+                <a:cs typeface="Georgia" pitchFamily="34" charset="-120"/>
+              </a:rPr>
+              <a:t>Project work.</a:t>
+            </a:r>
+            <a:pPr algn="l" indent="0" marL="0">
+              <a:lnSpc>
+                <a:spcPts val="1820"/>
+              </a:lnSpc>
+              <a:spcBef>
+                <a:spcPts val="300"/>
+              </a:spcBef>
+              <a:spcAft>
+                <a:spcPts val="300"/>
+              </a:spcAft>
+              <a:buNone/>
+            </a:pPr>
+            <a:r>
+              <a:rPr lang="en-US" sz="1300" dirty="0">
+                <a:solidFill>
+                  <a:srgbClr val="1C2833"/>
+                </a:solidFill>
+                <a:latin typeface="Georgia" pitchFamily="34" charset="0"/>
+                <a:ea typeface="Georgia" pitchFamily="34" charset="-122"/>
+                <a:cs typeface="Georgia" pitchFamily="34" charset="-120"/>
+              </a:rPr>
+              <a:t> Make real progress today — by end of class you should be 70% done.</a:t>
+            </a:r>
+            <a:endParaRPr lang="en-US" sz="1300" dirty="0"/>
+          </a:p>
+        </p:txBody>
+      </p:sp>
+      <p:sp>
+        <p:nvSpPr>
+          <p:cNvPr id="9" name="Text 7"/>
+          <p:cNvSpPr/>
+          <p:nvPr/>
+        </p:nvSpPr>
+        <p:spPr>
+          <a:xfrm>
+            <a:off x="692051" y="1881336"/>
+            <a:ext cx="7973389" cy="230981"/>
+          </a:xfrm>
+          <a:prstGeom prst="rect">
+            <a:avLst/>
+          </a:prstGeom>
+          <a:noFill/>
+          <a:ln/>
+        </p:spPr>
+        <p:txBody>
+          <a:bodyPr wrap="square" lIns="0" tIns="0" rIns="0" bIns="0" rtlCol="0" anchor="t"/>
+          <a:lstStyle/>
+          <a:p>
+            <a:pPr algn="l" indent="0" marL="0">
+              <a:lnSpc>
+                <a:spcPts val="1820"/>
+              </a:lnSpc>
+              <a:spcBef>
+                <a:spcPts val="300"/>
+              </a:spcBef>
+              <a:spcAft>
+                <a:spcPts val="300"/>
+              </a:spcAft>
+              <a:buNone/>
+            </a:pPr>
+            <a:r>
+              <a:rPr lang="en-US" sz="1300" b="1" i="1" dirty="0">
+                <a:solidFill>
+                  <a:srgbClr val="1C2833"/>
+                </a:solidFill>
+                <a:latin typeface="Georgia" pitchFamily="34" charset="0"/>
+                <a:ea typeface="Georgia" pitchFamily="34" charset="-122"/>
+                <a:cs typeface="Georgia" pitchFamily="34" charset="-120"/>
+              </a:rPr>
+              <a:t>Project Day 10:</a:t>
+            </a:r>
+            <a:pPr algn="l" indent="0" marL="0">
+              <a:lnSpc>
+                <a:spcPts val="1820"/>
+              </a:lnSpc>
+              <a:spcBef>
+                <a:spcPts val="300"/>
+              </a:spcBef>
+              <a:spcAft>
+                <a:spcPts val="300"/>
+              </a:spcAft>
+              <a:buNone/>
+            </a:pPr>
+            <a:r>
+              <a:rPr lang="en-US" sz="1300" dirty="0">
+                <a:solidFill>
+                  <a:srgbClr val="1C2833"/>
+                </a:solidFill>
+                <a:latin typeface="Georgia" pitchFamily="34" charset="0"/>
+                <a:ea typeface="Georgia" pitchFamily="34" charset="-122"/>
+                <a:cs typeface="Georgia" pitchFamily="34" charset="-120"/>
+              </a:rPr>
+              <a:t> 2-minute presentation + 1-min Q&amp;A. Be ready.</a:t>
+            </a:r>
+            <a:endParaRPr lang="en-US" sz="1300" dirty="0"/>
+          </a:p>
+        </p:txBody>
+      </p:sp>
+      <p:sp>
+        <p:nvSpPr>
+          <p:cNvPr id="10" name="Text 8"/>
+          <p:cNvSpPr/>
+          <p:nvPr/>
+        </p:nvSpPr>
+        <p:spPr>
+          <a:xfrm>
+            <a:off x="406301" y="4434929"/>
+            <a:ext cx="8498026" cy="213271"/>
+          </a:xfrm>
+          <a:prstGeom prst="rect">
+            <a:avLst/>
+          </a:prstGeom>
+          <a:noFill/>
+          <a:ln/>
+        </p:spPr>
+        <p:txBody>
+          <a:bodyPr wrap="square" lIns="0" tIns="0" rIns="0" bIns="0" rtlCol="0" anchor="t"/>
+          <a:lstStyle/>
+          <a:p>
+            <a:pPr algn="l" indent="0" marL="0">
+              <a:lnSpc>
+                <a:spcPts val="1680"/>
+              </a:lnSpc>
+              <a:spcBef>
+                <a:spcPts val="300"/>
+              </a:spcBef>
+              <a:spcAft>
+                <a:spcPts val="300"/>
+              </a:spcAft>
+              <a:buNone/>
+            </a:pPr>
+            <a:r>
+              <a:rPr lang="en-US" sz="1200" dirty="0">
+                <a:solidFill>
+                  <a:srgbClr val="1C2833"/>
+                </a:solidFill>
+                <a:latin typeface="Arial" pitchFamily="34" charset="0"/>
+                <a:ea typeface="Arial" pitchFamily="34" charset="-122"/>
+                <a:cs typeface="Arial" pitchFamily="34" charset="-120"/>
+              </a:rPr>
+              <a:t>Middle ·  · IKS Curriculum</a:t>
+            </a:r>
+            <a:endParaRPr lang="en-US" sz="1200" dirty="0"/>
+          </a:p>
+        </p:txBody>
+      </p:sp>
+    </p:spTree>
+  </p:cSld>
+  <p:clrMapOvr>
+    <a:masterClrMapping/>
+  </p:clrMapOvr>
+</p:sld>
+</file>
+
+<file path=ppt/slides/slide13.xml><?xml version="1.0" encoding="utf-8"?>
+<p:sld xmlns:a="http://schemas.openxmlformats.org/drawingml/2006/main" xmlns:r="http://schemas.openxmlformats.org/officeDocument/2006/relationships" xmlns:p="http://schemas.openxmlformats.org/presentationml/2006/main">
+  <p:cSld name="Slide 13">
+    <p:bg>
+      <p:bgPr>
+        <a:solidFill>
+          <a:srgbClr val="FFFFFF"/>
+        </a:solidFill>
+      </p:bgPr>
+    </p:bg>
+    <p:spTree>
+      <p:nvGrpSpPr>
+        <p:cNvPr id="1" name=""/>
+        <p:cNvGrpSpPr/>
+        <p:nvPr/>
+      </p:nvGrpSpPr>
+      <p:grpSpPr>
+        <a:xfrm>
+          <a:off x="0" y="0"/>
+          <a:ext cx="0" cy="0"/>
+          <a:chOff x="0" y="0"/>
+          <a:chExt cx="0" cy="0"/>
+        </a:xfrm>
+      </p:grpSpPr>
+      <p:sp>
+        <p:nvSpPr>
+          <p:cNvPr id="2" name="Text 0"/>
+          <p:cNvSpPr/>
+          <p:nvPr/>
+        </p:nvSpPr>
+        <p:spPr>
+          <a:xfrm>
+            <a:off x="0" y="0"/>
+            <a:ext cx="9144000" cy="101501"/>
+          </a:xfrm>
+          <a:prstGeom prst="rect">
+            <a:avLst/>
+          </a:prstGeom>
+          <a:solidFill>
+            <a:srgbClr val="277884"/>
+          </a:solidFill>
+          <a:ln/>
+        </p:spPr>
+        <p:txBody>
+          <a:bodyPr wrap="square" rtlCol="0" anchor="ctr"/>
+          <a:lstStyle/>
+          <a:p>
+            <a:pPr indent="0" marL="0">
+              <a:buNone/>
+            </a:pPr>
+            <a:endParaRPr lang="en-US" dirty="0"/>
+          </a:p>
+        </p:txBody>
+      </p:sp>
+      <p:sp>
+        <p:nvSpPr>
+          <p:cNvPr id="3" name="Text 1"/>
+          <p:cNvSpPr/>
+          <p:nvPr/>
+        </p:nvSpPr>
+        <p:spPr>
+          <a:xfrm>
+            <a:off x="406301" y="457051"/>
+            <a:ext cx="8498026" cy="274290"/>
+          </a:xfrm>
+          <a:prstGeom prst="rect">
+            <a:avLst/>
+          </a:prstGeom>
+          <a:noFill/>
+          <a:ln/>
+        </p:spPr>
+        <p:txBody>
+          <a:bodyPr wrap="square" lIns="0" tIns="0" rIns="0" bIns="0" rtlCol="0" anchor="t"/>
+          <a:lstStyle/>
+          <a:p>
+            <a:pPr algn="l" indent="0" marL="0">
+              <a:lnSpc>
+                <a:spcPts val="2160"/>
+              </a:lnSpc>
+              <a:spcBef>
+                <a:spcPts val="600"/>
+              </a:spcBef>
+              <a:spcAft>
+                <a:spcPts val="800"/>
+              </a:spcAft>
+              <a:buNone/>
+            </a:pPr>
+            <a:r>
+              <a:rPr lang="en-US" sz="1800" b="1" dirty="0">
+                <a:solidFill>
+                  <a:srgbClr val="FE4447"/>
+                </a:solidFill>
+                <a:latin typeface="Georgia" pitchFamily="34" charset="0"/>
+                <a:ea typeface="Georgia" pitchFamily="34" charset="-122"/>
+                <a:cs typeface="Georgia" pitchFamily="34" charset="-120"/>
+              </a:rPr>
+              <a:t>Homework</a:t>
+            </a:r>
+            <a:endParaRPr lang="en-US" sz="1800" dirty="0"/>
+          </a:p>
+        </p:txBody>
+      </p:sp>
+      <p:sp>
+        <p:nvSpPr>
+          <p:cNvPr id="4" name="Text 2"/>
+          <p:cNvSpPr/>
+          <p:nvPr/>
+        </p:nvSpPr>
+        <p:spPr>
+          <a:xfrm>
+            <a:off x="634901" y="883593"/>
+            <a:ext cx="8102798" cy="487561"/>
+          </a:xfrm>
+          <a:prstGeom prst="rect">
+            <a:avLst/>
+          </a:prstGeom>
+          <a:noFill/>
+          <a:ln/>
+        </p:spPr>
+        <p:txBody>
+          <a:bodyPr wrap="square" lIns="0" tIns="0" rIns="0" bIns="0" rtlCol="0" anchor="t"/>
+          <a:lstStyle/>
+          <a:p>
+            <a:pPr algn="l" marL="342900" indent="-342900">
+              <a:lnSpc>
+                <a:spcPts val="1620"/>
+              </a:lnSpc>
+              <a:spcAft>
+                <a:spcPts val="300"/>
+              </a:spcAft>
+              <a:buSzPct val="100000"/>
+              <a:buChar char="•"/>
+            </a:pPr>
+            <a:r>
+              <a:rPr lang="en-US" sz="1200" dirty="0">
+                <a:solidFill>
+                  <a:srgbClr val="1C2833"/>
+                </a:solidFill>
+                <a:latin typeface="Arial" pitchFamily="34" charset="0"/>
+                <a:ea typeface="Arial" pitchFamily="34" charset="-122"/>
+                <a:cs typeface="Arial" pitchFamily="34" charset="-120"/>
+              </a:rPr>
+              <a:t>Finish your project at home. 30 minutes max. If it's not finishable in 30 minutes, </a:t>
+            </a:r>
+            <a:pPr algn="l" indent="0" marL="0">
+              <a:lnSpc>
+                <a:spcPts val="1620"/>
+              </a:lnSpc>
+              <a:spcAft>
+                <a:spcPts val="300"/>
+              </a:spcAft>
+              <a:buNone/>
+            </a:pPr>
+            <a:r>
+              <a:rPr lang="en-US" sz="1200" b="1" dirty="0">
+                <a:solidFill>
+                  <a:srgbClr val="1C2833"/>
+                </a:solidFill>
+                <a:latin typeface="Arial" pitchFamily="34" charset="0"/>
+                <a:ea typeface="Arial" pitchFamily="34" charset="-122"/>
+                <a:cs typeface="Arial" pitchFamily="34" charset="-120"/>
+              </a:rPr>
+              <a:t>simplify it</a:t>
+            </a:r>
+            <a:pPr algn="l" indent="0" marL="0">
+              <a:lnSpc>
+                <a:spcPts val="1620"/>
+              </a:lnSpc>
+              <a:spcAft>
+                <a:spcPts val="300"/>
+              </a:spcAft>
+              <a:buNone/>
+            </a:pPr>
+            <a:r>
+              <a:rPr lang="en-US" sz="1200" dirty="0">
+                <a:solidFill>
+                  <a:srgbClr val="1C2833"/>
+                </a:solidFill>
+                <a:latin typeface="Arial" pitchFamily="34" charset="0"/>
+                <a:ea typeface="Arial" pitchFamily="34" charset="-122"/>
+                <a:cs typeface="Arial" pitchFamily="34" charset="-120"/>
+              </a:rPr>
+              <a:t> — better a complete simple project than a half-done ambitious one.</a:t>
+            </a:r>
+            <a:endParaRPr lang="en-US" sz="1200" dirty="0"/>
+          </a:p>
+        </p:txBody>
+      </p:sp>
+      <p:sp>
+        <p:nvSpPr>
+          <p:cNvPr id="5" name="Text 3"/>
+          <p:cNvSpPr/>
+          <p:nvPr/>
+        </p:nvSpPr>
+        <p:spPr>
+          <a:xfrm>
+            <a:off x="406301" y="4434929"/>
+            <a:ext cx="8498026" cy="213271"/>
+          </a:xfrm>
+          <a:prstGeom prst="rect">
+            <a:avLst/>
+          </a:prstGeom>
+          <a:noFill/>
+          <a:ln/>
+        </p:spPr>
+        <p:txBody>
+          <a:bodyPr wrap="square" lIns="0" tIns="0" rIns="0" bIns="0" rtlCol="0" anchor="t"/>
+          <a:lstStyle/>
+          <a:p>
+            <a:pPr algn="l" indent="0" marL="0">
+              <a:lnSpc>
+                <a:spcPts val="1680"/>
+              </a:lnSpc>
+              <a:spcBef>
+                <a:spcPts val="300"/>
+              </a:spcBef>
+              <a:spcAft>
+                <a:spcPts val="300"/>
+              </a:spcAft>
+              <a:buNone/>
+            </a:pPr>
+            <a:r>
+              <a:rPr lang="en-US" sz="1200" dirty="0">
+                <a:solidFill>
+                  <a:srgbClr val="1C2833"/>
+                </a:solidFill>
+                <a:latin typeface="Arial" pitchFamily="34" charset="0"/>
+                <a:ea typeface="Arial" pitchFamily="34" charset="-122"/>
+                <a:cs typeface="Arial" pitchFamily="34" charset="-120"/>
+              </a:rPr>
+              <a:t>Middle ·  · IKS Curriculum</a:t>
+            </a:r>
+            <a:endParaRPr lang="en-US" sz="1200" dirty="0"/>
+          </a:p>
+        </p:txBody>
+      </p:sp>
+    </p:spTree>
+  </p:cSld>
+  <p:clrMapOvr>
+    <a:masterClrMapping/>
+  </p:clrMapOvr>
+</p:sld>
+</file>
+
+<file path=ppt/slides/slide14.xml><?xml version="1.0" encoding="utf-8"?>
+<p:sld xmlns:a="http://schemas.openxmlformats.org/drawingml/2006/main" xmlns:r="http://schemas.openxmlformats.org/officeDocument/2006/relationships" xmlns:p="http://schemas.openxmlformats.org/presentationml/2006/main">
+  <p:cSld name="Slide 14">
+    <p:bg>
+      <p:bgPr>
+        <a:solidFill>
+          <a:srgbClr val="FFFFFF"/>
+        </a:solidFill>
+      </p:bgPr>
+    </p:bg>
+    <p:spTree>
+      <p:nvGrpSpPr>
+        <p:cNvPr id="1" name=""/>
+        <p:cNvGrpSpPr/>
+        <p:nvPr/>
+      </p:nvGrpSpPr>
+      <p:grpSpPr>
+        <a:xfrm>
+          <a:off x="0" y="0"/>
+          <a:ext cx="0" cy="0"/>
+          <a:chOff x="0" y="0"/>
+          <a:chExt cx="0" cy="0"/>
+        </a:xfrm>
+      </p:grpSpPr>
+      <p:sp>
+        <p:nvSpPr>
+          <p:cNvPr id="2" name="Text 0"/>
+          <p:cNvSpPr/>
+          <p:nvPr/>
+        </p:nvSpPr>
+        <p:spPr>
+          <a:xfrm>
+            <a:off x="0" y="0"/>
+            <a:ext cx="9144000" cy="101501"/>
+          </a:xfrm>
+          <a:prstGeom prst="rect">
+            <a:avLst/>
+          </a:prstGeom>
+          <a:solidFill>
+            <a:srgbClr val="277884"/>
+          </a:solidFill>
+          <a:ln/>
+        </p:spPr>
+        <p:txBody>
+          <a:bodyPr wrap="square" rtlCol="0" anchor="ctr"/>
+          <a:lstStyle/>
+          <a:p>
+            <a:pPr indent="0" marL="0">
+              <a:buNone/>
+            </a:pPr>
+            <a:endParaRPr lang="en-US" dirty="0"/>
+          </a:p>
+        </p:txBody>
+      </p:sp>
+      <p:sp>
+        <p:nvSpPr>
+          <p:cNvPr id="3" name="Text 1"/>
+          <p:cNvSpPr/>
+          <p:nvPr/>
+        </p:nvSpPr>
+        <p:spPr>
+          <a:xfrm>
+            <a:off x="406301" y="457051"/>
+            <a:ext cx="8498026" cy="274290"/>
+          </a:xfrm>
+          <a:prstGeom prst="rect">
+            <a:avLst/>
+          </a:prstGeom>
+          <a:noFill/>
+          <a:ln/>
+        </p:spPr>
+        <p:txBody>
+          <a:bodyPr wrap="square" lIns="0" tIns="0" rIns="0" bIns="0" rtlCol="0" anchor="t"/>
+          <a:lstStyle/>
+          <a:p>
+            <a:pPr algn="l" indent="0" marL="0">
+              <a:lnSpc>
+                <a:spcPts val="2160"/>
+              </a:lnSpc>
+              <a:spcBef>
+                <a:spcPts val="600"/>
+              </a:spcBef>
+              <a:spcAft>
+                <a:spcPts val="800"/>
+              </a:spcAft>
+              <a:buNone/>
+            </a:pPr>
+            <a:r>
+              <a:rPr lang="en-US" sz="1800" b="1" dirty="0">
+                <a:solidFill>
+                  <a:srgbClr val="FE4447"/>
+                </a:solidFill>
+                <a:latin typeface="Georgia" pitchFamily="34" charset="0"/>
+                <a:ea typeface="Georgia" pitchFamily="34" charset="-122"/>
+                <a:cs typeface="Georgia" pitchFamily="34" charset="-120"/>
+              </a:rPr>
+              <a:t>Differentiation</a:t>
+            </a:r>
+            <a:endParaRPr lang="en-US" sz="1800" dirty="0"/>
+          </a:p>
+        </p:txBody>
+      </p:sp>
+      <p:sp>
+        <p:nvSpPr>
+          <p:cNvPr id="4" name="Text 2"/>
+          <p:cNvSpPr/>
+          <p:nvPr/>
+        </p:nvSpPr>
+        <p:spPr>
+          <a:xfrm>
+            <a:off x="634901" y="883593"/>
+            <a:ext cx="8102798" cy="525661"/>
+          </a:xfrm>
+          <a:prstGeom prst="rect">
+            <a:avLst/>
+          </a:prstGeom>
+          <a:noFill/>
+          <a:ln/>
+        </p:spPr>
+        <p:txBody>
+          <a:bodyPr wrap="square" lIns="0" tIns="0" rIns="0" bIns="0" rtlCol="0" anchor="t"/>
+          <a:lstStyle/>
+          <a:p>
+            <a:pPr algn="l" marL="342900" indent="-342900">
+              <a:lnSpc>
+                <a:spcPts val="1620"/>
+              </a:lnSpc>
+              <a:spcAft>
+                <a:spcPts val="300"/>
+              </a:spcAft>
+              <a:buSzPct val="100000"/>
+              <a:buChar char="•"/>
+            </a:pPr>
+            <a:r>
+              <a:rPr lang="en-US" sz="1200" b="1" dirty="0">
+                <a:solidFill>
+                  <a:srgbClr val="1C2833"/>
+                </a:solidFill>
+                <a:latin typeface="Arial" pitchFamily="34" charset="0"/>
+                <a:ea typeface="Arial" pitchFamily="34" charset="-122"/>
+                <a:cs typeface="Arial" pitchFamily="34" charset="-120"/>
+              </a:rPr>
+              <a:t>Tier up:</a:t>
+            </a:r>
+            <a:pPr algn="l" indent="0" marL="0">
+              <a:lnSpc>
+                <a:spcPts val="1620"/>
+              </a:lnSpc>
+              <a:spcAft>
+                <a:spcPts val="300"/>
+              </a:spcAft>
+              <a:buNone/>
+            </a:pPr>
+            <a:r>
+              <a:rPr lang="en-US" sz="1200" dirty="0">
+                <a:solidFill>
+                  <a:srgbClr val="1C2833"/>
+                </a:solidFill>
+                <a:latin typeface="Arial" pitchFamily="34" charset="0"/>
+                <a:ea typeface="Arial" pitchFamily="34" charset="-122"/>
+                <a:cs typeface="Arial" pitchFamily="34" charset="-120"/>
+              </a:rPr>
+              <a:t> Add a "challenge" section to your project: a 4-digit × 11 worked example with cascading carries.</a:t>
+            </a:r>
+            <a:endParaRPr lang="en-US" sz="1200" dirty="0"/>
+          </a:p>
+          <a:p>
+            <a:pPr algn="l" marL="342900" indent="-342900">
+              <a:lnSpc>
+                <a:spcPts val="1620"/>
+              </a:lnSpc>
+              <a:spcAft>
+                <a:spcPts val="300"/>
+              </a:spcAft>
+              <a:buSzPct val="100000"/>
+              <a:buChar char="•"/>
+            </a:pPr>
+            <a:r>
+              <a:rPr lang="en-US" sz="1200" b="1" dirty="0">
+                <a:solidFill>
+                  <a:srgbClr val="1C2833"/>
+                </a:solidFill>
+                <a:latin typeface="Arial" pitchFamily="34" charset="0"/>
+                <a:ea typeface="Arial" pitchFamily="34" charset="-122"/>
+                <a:cs typeface="Arial" pitchFamily="34" charset="-120"/>
+              </a:rPr>
+              <a:t>Tier down:</a:t>
+            </a:r>
+            <a:pPr algn="l" indent="0" marL="0">
+              <a:lnSpc>
+                <a:spcPts val="1620"/>
+              </a:lnSpc>
+              <a:spcAft>
+                <a:spcPts val="300"/>
+              </a:spcAft>
+              <a:buNone/>
+            </a:pPr>
+            <a:r>
+              <a:rPr lang="en-US" sz="1200" dirty="0">
+                <a:solidFill>
+                  <a:srgbClr val="1C2833"/>
+                </a:solidFill>
+                <a:latin typeface="Arial" pitchFamily="34" charset="0"/>
+                <a:ea typeface="Arial" pitchFamily="34" charset="-122"/>
+                <a:cs typeface="Arial" pitchFamily="34" charset="-120"/>
+              </a:rPr>
+              <a:t> Use the workbook template provided. Don't custom-design from scratch today.</a:t>
+            </a:r>
+            <a:endParaRPr lang="en-US" sz="1200" dirty="0"/>
+          </a:p>
+        </p:txBody>
+      </p:sp>
+      <p:sp>
+        <p:nvSpPr>
+          <p:cNvPr id="5" name="Text 3"/>
+          <p:cNvSpPr/>
+          <p:nvPr/>
+        </p:nvSpPr>
+        <p:spPr>
+          <a:xfrm>
+            <a:off x="406301" y="4434929"/>
+            <a:ext cx="8498026" cy="213271"/>
+          </a:xfrm>
+          <a:prstGeom prst="rect">
+            <a:avLst/>
+          </a:prstGeom>
+          <a:noFill/>
+          <a:ln/>
+        </p:spPr>
+        <p:txBody>
+          <a:bodyPr wrap="square" lIns="0" tIns="0" rIns="0" bIns="0" rtlCol="0" anchor="t"/>
+          <a:lstStyle/>
+          <a:p>
+            <a:pPr algn="l" indent="0" marL="0">
+              <a:lnSpc>
+                <a:spcPts val="1680"/>
+              </a:lnSpc>
+              <a:spcBef>
+                <a:spcPts val="300"/>
+              </a:spcBef>
+              <a:spcAft>
+                <a:spcPts val="300"/>
+              </a:spcAft>
+              <a:buNone/>
+            </a:pPr>
+            <a:r>
+              <a:rPr lang="en-US" sz="1200" dirty="0">
+                <a:solidFill>
+                  <a:srgbClr val="1C2833"/>
+                </a:solidFill>
+                <a:latin typeface="Arial" pitchFamily="34" charset="0"/>
+                <a:ea typeface="Arial" pitchFamily="34" charset="-122"/>
+                <a:cs typeface="Arial" pitchFamily="34" charset="-120"/>
+              </a:rPr>
+              <a:t>Middle ·  · IKS Curriculum</a:t>
+            </a:r>
+            <a:endParaRPr lang="en-US" sz="1200" dirty="0"/>
+          </a:p>
+        </p:txBody>
+      </p:sp>
+    </p:spTree>
+  </p:cSld>
+  <p:clrMapOvr>
+    <a:masterClrMapping/>
+  </p:clrMapOvr>
+</p:sld>
+</file>
+
+<file path=ppt/slides/slide15.xml><?xml version="1.0" encoding="utf-8"?>
+<p:sld xmlns:a="http://schemas.openxmlformats.org/drawingml/2006/main" xmlns:r="http://schemas.openxmlformats.org/officeDocument/2006/relationships" xmlns:p="http://schemas.openxmlformats.org/presentationml/2006/main">
+  <p:cSld name="Slide 15">
+    <p:bg>
+      <p:bgPr>
+        <a:solidFill>
+          <a:srgbClr val="FFFFFF"/>
+        </a:solidFill>
+      </p:bgPr>
+    </p:bg>
+    <p:spTree>
+      <p:nvGrpSpPr>
+        <p:cNvPr id="1" name=""/>
+        <p:cNvGrpSpPr/>
+        <p:nvPr/>
+      </p:nvGrpSpPr>
+      <p:grpSpPr>
+        <a:xfrm>
+          <a:off x="0" y="0"/>
+          <a:ext cx="0" cy="0"/>
+          <a:chOff x="0" y="0"/>
+          <a:chExt cx="0" cy="0"/>
+        </a:xfrm>
+      </p:grpSpPr>
+      <p:sp>
+        <p:nvSpPr>
+          <p:cNvPr id="2" name="Text 0"/>
+          <p:cNvSpPr/>
+          <p:nvPr/>
+        </p:nvSpPr>
+        <p:spPr>
+          <a:xfrm>
+            <a:off x="0" y="0"/>
+            <a:ext cx="9144000" cy="101501"/>
+          </a:xfrm>
+          <a:prstGeom prst="rect">
+            <a:avLst/>
+          </a:prstGeom>
+          <a:solidFill>
+            <a:srgbClr val="277884"/>
+          </a:solidFill>
+          <a:ln/>
+        </p:spPr>
+        <p:txBody>
+          <a:bodyPr wrap="square" rtlCol="0" anchor="ctr"/>
+          <a:lstStyle/>
+          <a:p>
+            <a:pPr indent="0" marL="0">
+              <a:buNone/>
+            </a:pPr>
+            <a:endParaRPr lang="en-US" dirty="0"/>
+          </a:p>
+        </p:txBody>
+      </p:sp>
+      <p:sp>
+        <p:nvSpPr>
+          <p:cNvPr id="3" name="Text 1"/>
+          <p:cNvSpPr/>
+          <p:nvPr/>
+        </p:nvSpPr>
+        <p:spPr>
+          <a:xfrm>
+            <a:off x="406301" y="457051"/>
+            <a:ext cx="8498026" cy="274290"/>
+          </a:xfrm>
+          <a:prstGeom prst="rect">
+            <a:avLst/>
+          </a:prstGeom>
+          <a:noFill/>
+          <a:ln/>
+        </p:spPr>
+        <p:txBody>
+          <a:bodyPr wrap="square" lIns="0" tIns="0" rIns="0" bIns="0" rtlCol="0" anchor="t"/>
+          <a:lstStyle/>
+          <a:p>
+            <a:pPr algn="l" indent="0" marL="0">
+              <a:lnSpc>
+                <a:spcPts val="2160"/>
+              </a:lnSpc>
+              <a:spcBef>
+                <a:spcPts val="600"/>
+              </a:spcBef>
+              <a:spcAft>
+                <a:spcPts val="800"/>
+              </a:spcAft>
+              <a:buNone/>
+            </a:pPr>
+            <a:r>
+              <a:rPr lang="en-US" sz="1800" b="1" dirty="0">
+                <a:solidFill>
+                  <a:srgbClr val="FE4447"/>
+                </a:solidFill>
+                <a:latin typeface="Georgia" pitchFamily="34" charset="0"/>
+                <a:ea typeface="Georgia" pitchFamily="34" charset="-122"/>
+                <a:cs typeface="Georgia" pitchFamily="34" charset="-120"/>
+              </a:rPr>
+              <a:t>Teacher notes</a:t>
+            </a:r>
+            <a:endParaRPr lang="en-US" sz="1800" dirty="0"/>
+          </a:p>
+        </p:txBody>
+      </p:sp>
+      <p:sp>
+        <p:nvSpPr>
+          <p:cNvPr id="4" name="Text 2"/>
+          <p:cNvSpPr/>
+          <p:nvPr/>
+        </p:nvSpPr>
+        <p:spPr>
+          <a:xfrm>
+            <a:off x="634901" y="883593"/>
+            <a:ext cx="8102798" cy="1180802"/>
+          </a:xfrm>
+          <a:prstGeom prst="rect">
+            <a:avLst/>
+          </a:prstGeom>
+          <a:noFill/>
+          <a:ln/>
+        </p:spPr>
+        <p:txBody>
+          <a:bodyPr wrap="square" lIns="0" tIns="0" rIns="0" bIns="0" rtlCol="0" anchor="t"/>
+          <a:lstStyle/>
+          <a:p>
+            <a:pPr algn="l" marL="342900" indent="-342900">
+              <a:lnSpc>
+                <a:spcPts val="1620"/>
+              </a:lnSpc>
+              <a:spcAft>
+                <a:spcPts val="300"/>
+              </a:spcAft>
+              <a:buSzPct val="100000"/>
+              <a:buChar char="•"/>
+            </a:pPr>
+            <a:r>
+              <a:rPr lang="en-US" sz="1200" dirty="0">
+                <a:solidFill>
+                  <a:srgbClr val="1C2833"/>
+                </a:solidFill>
+                <a:latin typeface="Arial" pitchFamily="34" charset="0"/>
+                <a:ea typeface="Arial" pitchFamily="34" charset="-122"/>
+                <a:cs typeface="Arial" pitchFamily="34" charset="-120"/>
+              </a:rPr>
+              <a:t>The project here is intentionally smaller-scope than Module 5's, because the technique is narrower (just ×11 plus the ×12–×19 family) and the assessment is more on the algebra than on the artefact.</a:t>
+            </a:r>
+            <a:endParaRPr lang="en-US" sz="1200" dirty="0"/>
+          </a:p>
+          <a:p>
+            <a:pPr algn="l" marL="342900" indent="-342900">
+              <a:lnSpc>
+                <a:spcPts val="1620"/>
+              </a:lnSpc>
+              <a:spcAft>
+                <a:spcPts val="300"/>
+              </a:spcAft>
+              <a:buSzPct val="100000"/>
+              <a:buChar char="•"/>
+            </a:pPr>
+            <a:r>
+              <a:rPr lang="en-US" sz="1200" dirty="0">
+                <a:solidFill>
+                  <a:srgbClr val="1C2833"/>
+                </a:solidFill>
+                <a:latin typeface="Arial" pitchFamily="34" charset="0"/>
+                <a:ea typeface="Arial" pitchFamily="34" charset="-122"/>
+                <a:cs typeface="Arial" pitchFamily="34" charset="-120"/>
+              </a:rPr>
+              <a:t>Watch for pairs who haven't started by mid-class. Pull them aside; offer the simplest format (proof poster) as a fallback.</a:t>
+            </a:r>
+            <a:endParaRPr lang="en-US" sz="1200" dirty="0"/>
+          </a:p>
+          <a:p>
+            <a:pPr algn="l" marL="342900" indent="-342900">
+              <a:lnSpc>
+                <a:spcPts val="1620"/>
+              </a:lnSpc>
+              <a:spcAft>
+                <a:spcPts val="300"/>
+              </a:spcAft>
+              <a:buSzPct val="100000"/>
+              <a:buChar char="•"/>
+            </a:pPr>
+            <a:r>
+              <a:rPr lang="en-US" sz="1200" dirty="0">
+                <a:solidFill>
+                  <a:srgbClr val="1C2833"/>
+                </a:solidFill>
+                <a:latin typeface="Arial" pitchFamily="34" charset="0"/>
+                <a:ea typeface="Arial" pitchFamily="34" charset="-122"/>
+                <a:cs typeface="Arial" pitchFamily="34" charset="-120"/>
+              </a:rPr>
+              <a:t>The proof poster format is recommended for pairs that struggled on Day 3 — making the algebra public forces them to internalise it.</a:t>
+            </a:r>
+            <a:endParaRPr lang="en-US" sz="1200" dirty="0"/>
+          </a:p>
+        </p:txBody>
+      </p:sp>
+      <p:sp>
+        <p:nvSpPr>
+          <p:cNvPr id="5" name="Text 3"/>
+          <p:cNvSpPr/>
+          <p:nvPr/>
+        </p:nvSpPr>
+        <p:spPr>
+          <a:xfrm>
+            <a:off x="406301" y="4434929"/>
+            <a:ext cx="8498026" cy="213271"/>
+          </a:xfrm>
+          <a:prstGeom prst="rect">
+            <a:avLst/>
+          </a:prstGeom>
+          <a:noFill/>
+          <a:ln/>
+        </p:spPr>
+        <p:txBody>
+          <a:bodyPr wrap="square" lIns="0" tIns="0" rIns="0" bIns="0" rtlCol="0" anchor="t"/>
+          <a:lstStyle/>
+          <a:p>
+            <a:pPr algn="l" indent="0" marL="0">
+              <a:lnSpc>
+                <a:spcPts val="1680"/>
+              </a:lnSpc>
+              <a:spcBef>
+                <a:spcPts val="300"/>
+              </a:spcBef>
+              <a:spcAft>
+                <a:spcPts val="300"/>
+              </a:spcAft>
+              <a:buNone/>
+            </a:pPr>
+            <a:r>
+              <a:rPr lang="en-US" sz="1200" dirty="0">
+                <a:solidFill>
+                  <a:srgbClr val="1C2833"/>
+                </a:solidFill>
+                <a:latin typeface="Arial" pitchFamily="34" charset="0"/>
+                <a:ea typeface="Arial" pitchFamily="34" charset="-122"/>
+                <a:cs typeface="Arial" pitchFamily="34" charset="-120"/>
+              </a:rPr>
+              <a:t>Middle ·  · IKS Curriculum</a:t>
+            </a:r>
+            <a:endParaRPr lang="en-US" sz="1200" dirty="0"/>
+          </a:p>
+        </p:txBody>
+      </p:sp>
+    </p:spTree>
+  </p:cSld>
+  <p:clrMapOvr>
+    <a:masterClrMapping/>
+  </p:clrMapOvr>
+</p:sld>
+</file>
+
+<file path=ppt/slides/slide16.xml><?xml version="1.0" encoding="utf-8"?>
+<p:sld xmlns:a="http://schemas.openxmlformats.org/drawingml/2006/main" xmlns:r="http://schemas.openxmlformats.org/officeDocument/2006/relationships" xmlns:p="http://schemas.openxmlformats.org/presentationml/2006/main">
+  <p:cSld name="Slide 16">
+    <p:bg>
+      <p:bgPr>
+        <a:solidFill>
+          <a:srgbClr val="FFFFFF"/>
+        </a:solidFill>
+      </p:bgPr>
+    </p:bg>
+    <p:spTree>
+      <p:nvGrpSpPr>
+        <p:cNvPr id="1" name=""/>
+        <p:cNvGrpSpPr/>
+        <p:nvPr/>
+      </p:nvGrpSpPr>
+      <p:grpSpPr>
+        <a:xfrm>
+          <a:off x="0" y="0"/>
+          <a:ext cx="0" cy="0"/>
+          <a:chOff x="0" y="0"/>
+          <a:chExt cx="0" cy="0"/>
+        </a:xfrm>
+      </p:grpSpPr>
+      <p:sp>
+        <p:nvSpPr>
+          <p:cNvPr id="2" name="Text 0"/>
+          <p:cNvSpPr/>
+          <p:nvPr/>
+        </p:nvSpPr>
+        <p:spPr>
+          <a:xfrm>
+            <a:off x="0" y="0"/>
+            <a:ext cx="9144000" cy="101501"/>
+          </a:xfrm>
+          <a:prstGeom prst="rect">
+            <a:avLst/>
+          </a:prstGeom>
+          <a:solidFill>
+            <a:srgbClr val="277884"/>
+          </a:solidFill>
+          <a:ln/>
+        </p:spPr>
+        <p:txBody>
+          <a:bodyPr wrap="square" rtlCol="0" anchor="ctr"/>
+          <a:lstStyle/>
+          <a:p>
+            <a:pPr indent="0" marL="0">
+              <a:buNone/>
+            </a:pPr>
+            <a:endParaRPr lang="en-US" dirty="0"/>
+          </a:p>
+        </p:txBody>
+      </p:sp>
+      <p:sp>
+        <p:nvSpPr>
+          <p:cNvPr id="3" name="Text 1"/>
+          <p:cNvSpPr/>
+          <p:nvPr/>
+        </p:nvSpPr>
+        <p:spPr>
+          <a:xfrm>
+            <a:off x="406301" y="457051"/>
+            <a:ext cx="8498026" cy="274290"/>
+          </a:xfrm>
+          <a:prstGeom prst="rect">
+            <a:avLst/>
+          </a:prstGeom>
+          <a:noFill/>
+          <a:ln/>
+        </p:spPr>
+        <p:txBody>
+          <a:bodyPr wrap="square" lIns="0" tIns="0" rIns="0" bIns="0" rtlCol="0" anchor="t"/>
+          <a:lstStyle/>
+          <a:p>
+            <a:pPr algn="l" indent="0" marL="0">
+              <a:lnSpc>
+                <a:spcPts val="2160"/>
+              </a:lnSpc>
+              <a:spcBef>
+                <a:spcPts val="600"/>
+              </a:spcBef>
+              <a:spcAft>
+                <a:spcPts val="800"/>
+              </a:spcAft>
+              <a:buNone/>
+            </a:pPr>
+            <a:r>
+              <a:rPr lang="en-US" sz="1800" b="1" dirty="0">
+                <a:solidFill>
+                  <a:srgbClr val="FE4447"/>
+                </a:solidFill>
+                <a:latin typeface="Georgia" pitchFamily="34" charset="0"/>
+                <a:ea typeface="Georgia" pitchFamily="34" charset="-122"/>
+                <a:cs typeface="Georgia" pitchFamily="34" charset="-120"/>
+              </a:rPr>
               <a:t>Citation(s) used in this lesson</a:t>
             </a:r>
             <a:endParaRPr lang="en-US" sz="1800" dirty="0"/>
@@ -3064,7 +4494,7 @@
                 <a:ea typeface="Georgia" pitchFamily="34" charset="-122"/>
                 <a:cs typeface="Georgia" pitchFamily="34" charset="-120"/>
               </a:rPr>
-              <a:t>Materials</a:t>
+              <a:t>Learning objective</a:t>
             </a:r>
             <a:endParaRPr lang="en-US" sz="1800" dirty="0"/>
           </a:p>
@@ -3112,7 +4542,7 @@
                 <a:ea typeface="Arial" pitchFamily="34" charset="-122"/>
                 <a:cs typeface="Arial" pitchFamily="34" charset="-120"/>
               </a:rPr>
-              <a:t>– Mixed-practice drill sheet (20 problems). – Project materials per pair: paper, markers, phone (for video pairs), template sheets (for workbook pairs).</a:t>
+              <a:t>By the end of this lesson, students will complete a mixed-practice drill covering 2-digit ×11, 3-digit ×11, and ×12–×19 problems, and will make substantial progress on their project (video, workbook, or proof poster).</a:t>
             </a:r>
             <a:endParaRPr lang="en-US" sz="1200" dirty="0"/>
           </a:p>
@@ -3121,72 +4551,6 @@
       <p:sp>
         <p:nvSpPr>
           <p:cNvPr id="5" name="Text 3"/>
-          <p:cNvSpPr/>
-          <p:nvPr/>
-        </p:nvSpPr>
-        <p:spPr>
-          <a:xfrm>
-            <a:off x="634901" y="1386334"/>
-            <a:ext cx="8102798" cy="300930"/>
-          </a:xfrm>
-          <a:prstGeom prst="rect">
-            <a:avLst/>
-          </a:prstGeom>
-          <a:noFill/>
-          <a:ln/>
-        </p:spPr>
-        <p:txBody>
-          <a:bodyPr wrap="square" lIns="0" tIns="0" rIns="0" bIns="0" rtlCol="0" anchor="t"/>
-          <a:lstStyle/>
-          <a:p>
-            <a:pPr algn="l" marL="342900" indent="-342900">
-              <a:lnSpc>
-                <a:spcPts val="1620"/>
-              </a:lnSpc>
-              <a:spcAft>
-                <a:spcPts val="300"/>
-              </a:spcAft>
-              <a:buSzPct val="100000"/>
-              <a:buChar char="•"/>
-            </a:pPr>
-            <a:r>
-              <a:rPr lang="en-US" sz="1200" dirty="0">
-                <a:solidFill>
-                  <a:srgbClr val="1C2833"/>
-                </a:solidFill>
-                <a:latin typeface="Arial" pitchFamily="34" charset="0"/>
-                <a:ea typeface="Arial" pitchFamily="34" charset="-122"/>
-                <a:cs typeface="Arial" pitchFamily="34" charset="-120"/>
-              </a:rPr>
-              <a:t>assessments/rubric.md</a:t>
-            </a:r>
-            <a:pPr algn="l" indent="0" marL="0">
-              <a:lnSpc>
-                <a:spcPts val="1620"/>
-              </a:lnSpc>
-              <a:spcAft>
-                <a:spcPts val="300"/>
-              </a:spcAft>
-              <a:buNone/>
-            </a:pPr>
-            <a:r>
-              <a:rPr lang="en-US" sz="1200" dirty="0">
-                <a:solidFill>
-                  <a:srgbClr val="1C2833"/>
-                </a:solidFill>
-                <a:latin typeface="Arial" pitchFamily="34" charset="0"/>
-                <a:ea typeface="Arial" pitchFamily="34" charset="-122"/>
-                <a:cs typeface="Arial" pitchFamily="34" charset="-120"/>
-              </a:rPr>
-              <a:t> posted on the wall for reference.</a:t>
-            </a:r>
-            <a:endParaRPr lang="en-US" sz="1200" dirty="0"/>
-          </a:p>
-        </p:txBody>
-      </p:sp>
-      <p:sp>
-        <p:nvSpPr>
-          <p:cNvPr id="6" name="Text 4"/>
           <p:cNvSpPr/>
           <p:nvPr/>
         </p:nvSpPr>
@@ -3336,7 +4700,7 @@
                 <a:ea typeface="Georgia" pitchFamily="34" charset="-122"/>
                 <a:cs typeface="Georgia" pitchFamily="34" charset="-120"/>
               </a:rPr>
-              <a:t>Lesson flow</a:t>
+              <a:t>Materials</a:t>
             </a:r>
             <a:endParaRPr lang="en-US" sz="1800" dirty="0"/>
           </a:p>
@@ -3345,6 +4709,120 @@
       <p:sp>
         <p:nvSpPr>
           <p:cNvPr id="4" name="Text 2"/>
+          <p:cNvSpPr/>
+          <p:nvPr/>
+        </p:nvSpPr>
+        <p:spPr>
+          <a:xfrm>
+            <a:off x="634901" y="883593"/>
+            <a:ext cx="8102798" cy="788491"/>
+          </a:xfrm>
+          <a:prstGeom prst="rect">
+            <a:avLst/>
+          </a:prstGeom>
+          <a:noFill/>
+          <a:ln/>
+        </p:spPr>
+        <p:txBody>
+          <a:bodyPr wrap="square" lIns="0" tIns="0" rIns="0" bIns="0" rtlCol="0" anchor="t"/>
+          <a:lstStyle/>
+          <a:p>
+            <a:pPr algn="l" marL="342900" indent="-342900">
+              <a:lnSpc>
+                <a:spcPts val="1620"/>
+              </a:lnSpc>
+              <a:spcAft>
+                <a:spcPts val="300"/>
+              </a:spcAft>
+              <a:buSzPct val="100000"/>
+              <a:buChar char="•"/>
+            </a:pPr>
+            <a:r>
+              <a:rPr lang="en-US" sz="1200" dirty="0">
+                <a:solidFill>
+                  <a:srgbClr val="1C2833"/>
+                </a:solidFill>
+                <a:latin typeface="Arial" pitchFamily="34" charset="0"/>
+                <a:ea typeface="Arial" pitchFamily="34" charset="-122"/>
+                <a:cs typeface="Arial" pitchFamily="34" charset="-120"/>
+              </a:rPr>
+              <a:t>Mixed-practice drill sheet (20 problems).</a:t>
+            </a:r>
+            <a:endParaRPr lang="en-US" sz="1200" dirty="0"/>
+          </a:p>
+          <a:p>
+            <a:pPr algn="l" marL="342900" indent="-342900">
+              <a:lnSpc>
+                <a:spcPts val="1620"/>
+              </a:lnSpc>
+              <a:spcAft>
+                <a:spcPts val="300"/>
+              </a:spcAft>
+              <a:buSzPct val="100000"/>
+              <a:buChar char="•"/>
+            </a:pPr>
+            <a:r>
+              <a:rPr lang="en-US" sz="1200" dirty="0">
+                <a:solidFill>
+                  <a:srgbClr val="1C2833"/>
+                </a:solidFill>
+                <a:latin typeface="Arial" pitchFamily="34" charset="0"/>
+                <a:ea typeface="Arial" pitchFamily="34" charset="-122"/>
+                <a:cs typeface="Arial" pitchFamily="34" charset="-120"/>
+              </a:rPr>
+              <a:t>Project materials per pair: paper, markers, phone (for video pairs), template sheets (for workbook pairs).</a:t>
+            </a:r>
+            <a:endParaRPr lang="en-US" sz="1200" dirty="0"/>
+          </a:p>
+          <a:p>
+            <a:pPr algn="l" marL="342900" indent="-342900">
+              <a:lnSpc>
+                <a:spcPts val="1620"/>
+              </a:lnSpc>
+              <a:spcAft>
+                <a:spcPts val="300"/>
+              </a:spcAft>
+              <a:buSzPct val="100000"/>
+              <a:buChar char="•"/>
+            </a:pPr>
+            <a:r>
+              <a:rPr lang="en-US" sz="1200" dirty="0">
+                <a:solidFill>
+                  <a:srgbClr val="1C2833"/>
+                </a:solidFill>
+                <a:latin typeface="Arial" pitchFamily="34" charset="0"/>
+                <a:ea typeface="Arial" pitchFamily="34" charset="-122"/>
+                <a:cs typeface="Arial" pitchFamily="34" charset="-120"/>
+              </a:rPr>
+              <a:t>assessments/rubric.md</a:t>
+            </a:r>
+            <a:pPr algn="l" indent="0" marL="0">
+              <a:lnSpc>
+                <a:spcPts val="1620"/>
+              </a:lnSpc>
+              <a:spcAft>
+                <a:spcPts val="300"/>
+              </a:spcAft>
+              <a:buNone/>
+            </a:pPr>
+            <a:r>
+              <a:rPr lang="en-US" sz="1200" dirty="0">
+                <a:solidFill>
+                  <a:srgbClr val="1C2833"/>
+                </a:solidFill>
+                <a:latin typeface="Arial" pitchFamily="34" charset="0"/>
+                <a:ea typeface="Arial" pitchFamily="34" charset="-122"/>
+                <a:cs typeface="Arial" pitchFamily="34" charset="-120"/>
+              </a:rPr>
+              <a:t> posted on the wall for reference.</a:t>
+            </a:r>
+            <a:endParaRPr lang="en-US" sz="1200" dirty="0"/>
+          </a:p>
+        </p:txBody>
+      </p:sp>
+      <p:sp>
+        <p:nvSpPr>
+          <p:cNvPr id="5" name="Text 3"/>
           <p:cNvSpPr/>
           <p:nvPr/>
         </p:nvSpPr>
@@ -3494,7 +4972,7 @@
                 <a:ea typeface="Georgia" pitchFamily="34" charset="-122"/>
                 <a:cs typeface="Georgia" pitchFamily="34" charset="-120"/>
               </a:rPr>
-              <a:t>Warm-up (3 min)</a:t>
+              <a:t>Lesson flow</a:t>
             </a:r>
             <a:endParaRPr lang="en-US" sz="1800" dirty="0"/>
           </a:p>
@@ -3503,54 +4981,6 @@
       <p:sp>
         <p:nvSpPr>
           <p:cNvPr id="4" name="Text 2"/>
-          <p:cNvSpPr/>
-          <p:nvPr/>
-        </p:nvSpPr>
-        <p:spPr>
-          <a:xfrm>
-            <a:off x="406301" y="870942"/>
-            <a:ext cx="8498026" cy="213271"/>
-          </a:xfrm>
-          <a:prstGeom prst="rect">
-            <a:avLst/>
-          </a:prstGeom>
-          <a:noFill/>
-          <a:ln/>
-        </p:spPr>
-        <p:txBody>
-          <a:bodyPr wrap="square" lIns="0" tIns="0" rIns="0" bIns="0" rtlCol="0" anchor="t"/>
-          <a:lstStyle/>
-          <a:p>
-            <a:pPr algn="l" indent="0" marL="0">
-              <a:lnSpc>
-                <a:spcPts val="1680"/>
-              </a:lnSpc>
-              <a:spcBef>
-                <a:spcPts val="300"/>
-              </a:spcBef>
-              <a:spcAft>
-                <a:spcPts val="300"/>
-              </a:spcAft>
-              <a:buNone/>
-            </a:pPr>
-            <a:r>
-              <a:rPr lang="en-US" sz="1200" dirty="0">
-                <a:solidFill>
-                  <a:srgbClr val="1C2833"/>
-                </a:solidFill>
-                <a:latin typeface="Arial" pitchFamily="34" charset="0"/>
-                <a:ea typeface="Arial" pitchFamily="34" charset="-122"/>
-                <a:cs typeface="Arial" pitchFamily="34" charset="-120"/>
-              </a:rPr>
-              <a:t>– 8 quick mental ×11 problems including carry. Should be near-instant.</a:t>
-            </a:r>
-            <a:endParaRPr lang="en-US" sz="1200" dirty="0"/>
-          </a:p>
-        </p:txBody>
-      </p:sp>
-      <p:sp>
-        <p:nvSpPr>
-          <p:cNvPr id="5" name="Text 3"/>
           <p:cNvSpPr/>
           <p:nvPr/>
         </p:nvSpPr>
@@ -3700,7 +5130,7 @@
                 <a:ea typeface="Georgia" pitchFamily="34" charset="-122"/>
                 <a:cs typeface="Georgia" pitchFamily="34" charset="-120"/>
               </a:rPr>
-              <a:t>Mixed-practice drill (12 min)</a:t>
+              <a:t>Warm-up (3 min)</a:t>
             </a:r>
             <a:endParaRPr lang="en-US" sz="1800" dirty="0"/>
           </a:p>
@@ -3714,8 +5144,8 @@
         </p:nvSpPr>
         <p:spPr>
           <a:xfrm>
-            <a:off x="406301" y="870942"/>
-            <a:ext cx="8498026" cy="426541"/>
+            <a:off x="634901" y="883593"/>
+            <a:ext cx="8102798" cy="281880"/>
           </a:xfrm>
           <a:prstGeom prst="rect">
             <a:avLst/>
@@ -3727,17 +5157,15 @@
           <a:bodyPr wrap="square" lIns="0" tIns="0" rIns="0" bIns="0" rtlCol="0" anchor="t"/>
           <a:lstStyle/>
           <a:p>
-            <a:pPr algn="l" indent="0" marL="0">
-              <a:lnSpc>
-                <a:spcPts val="1680"/>
-              </a:lnSpc>
-              <a:spcBef>
-                <a:spcPts val="300"/>
-              </a:spcBef>
-              <a:spcAft>
-                <a:spcPts val="300"/>
-              </a:spcAft>
-              <a:buNone/>
+            <a:pPr algn="l" marL="342900" indent="-342900">
+              <a:lnSpc>
+                <a:spcPts val="1620"/>
+              </a:lnSpc>
+              <a:spcAft>
+                <a:spcPts val="300"/>
+              </a:spcAft>
+              <a:buSzPct val="100000"/>
+              <a:buChar char="•"/>
             </a:pPr>
             <a:r>
               <a:rPr lang="en-US" sz="1200" dirty="0">
@@ -3748,7 +5176,7 @@
                 <a:ea typeface="Arial" pitchFamily="34" charset="-122"/>
                 <a:cs typeface="Arial" pitchFamily="34" charset="-120"/>
               </a:rPr>
-              <a:t>– Distribute 20-problem sheet:   – 5 problems: 2-digit × 11 (no-carry)   – 5 problems: 2-digit × 11 (carry)   – 5 problems: 3-digit × 11   – 5 problems: 2-digit × 12 through ×19</a:t>
+              <a:t>8 quick mental ×11 problems including carry. Should be near-instant.</a:t>
             </a:r>
             <a:endParaRPr lang="en-US" sz="1200" dirty="0"/>
           </a:p>
@@ -3757,54 +5185,6 @@
       <p:sp>
         <p:nvSpPr>
           <p:cNvPr id="5" name="Text 3"/>
-          <p:cNvSpPr/>
-          <p:nvPr/>
-        </p:nvSpPr>
-        <p:spPr>
-          <a:xfrm>
-            <a:off x="406301" y="1373684"/>
-            <a:ext cx="8498026" cy="213271"/>
-          </a:xfrm>
-          <a:prstGeom prst="rect">
-            <a:avLst/>
-          </a:prstGeom>
-          <a:noFill/>
-          <a:ln/>
-        </p:spPr>
-        <p:txBody>
-          <a:bodyPr wrap="square" lIns="0" tIns="0" rIns="0" bIns="0" rtlCol="0" anchor="t"/>
-          <a:lstStyle/>
-          <a:p>
-            <a:pPr algn="l" indent="0" marL="0">
-              <a:lnSpc>
-                <a:spcPts val="1680"/>
-              </a:lnSpc>
-              <a:spcBef>
-                <a:spcPts val="300"/>
-              </a:spcBef>
-              <a:spcAft>
-                <a:spcPts val="300"/>
-              </a:spcAft>
-              <a:buNone/>
-            </a:pPr>
-            <a:r>
-              <a:rPr lang="en-US" sz="1200" dirty="0">
-                <a:solidFill>
-                  <a:srgbClr val="1C2833"/>
-                </a:solidFill>
-                <a:latin typeface="Arial" pitchFamily="34" charset="0"/>
-                <a:ea typeface="Arial" pitchFamily="34" charset="-122"/>
-                <a:cs typeface="Arial" pitchFamily="34" charset="-120"/>
-              </a:rPr>
-              <a:t>– Solo, untimed, but aim to finish in 10 min. – 2 min: pair-swap, peer-check three problems each.</a:t>
-            </a:r>
-            <a:endParaRPr lang="en-US" sz="1200" dirty="0"/>
-          </a:p>
-        </p:txBody>
-      </p:sp>
-      <p:sp>
-        <p:nvSpPr>
-          <p:cNvPr id="6" name="Text 4"/>
           <p:cNvSpPr/>
           <p:nvPr/>
         </p:nvSpPr>
@@ -3954,7 +5334,7 @@
                 <a:ea typeface="Georgia" pitchFamily="34" charset="-122"/>
                 <a:cs typeface="Georgia" pitchFamily="34" charset="-120"/>
               </a:rPr>
-              <a:t>Project session (28 min)</a:t>
+              <a:t>Mixed-practice drill (12 min)</a:t>
             </a:r>
             <a:endParaRPr lang="en-US" sz="1800" dirty="0"/>
           </a:p>
@@ -3968,8 +5348,8 @@
         </p:nvSpPr>
         <p:spPr>
           <a:xfrm>
-            <a:off x="406301" y="870942"/>
-            <a:ext cx="8498026" cy="853083"/>
+            <a:off x="634901" y="883593"/>
+            <a:ext cx="8102798" cy="1257002"/>
           </a:xfrm>
           <a:prstGeom prst="rect">
             <a:avLst/>
@@ -3981,17 +5361,15 @@
           <a:bodyPr wrap="square" lIns="0" tIns="0" rIns="0" bIns="0" rtlCol="0" anchor="t"/>
           <a:lstStyle/>
           <a:p>
-            <a:pPr algn="l" indent="0" marL="0">
-              <a:lnSpc>
-                <a:spcPts val="1680"/>
-              </a:lnSpc>
-              <a:spcBef>
-                <a:spcPts val="300"/>
-              </a:spcBef>
-              <a:spcAft>
-                <a:spcPts val="300"/>
-              </a:spcAft>
-              <a:buNone/>
+            <a:pPr algn="l" marL="342900" indent="-342900">
+              <a:lnSpc>
+                <a:spcPts val="1620"/>
+              </a:lnSpc>
+              <a:spcAft>
+                <a:spcPts val="300"/>
+              </a:spcAft>
+              <a:buSzPct val="100000"/>
+              <a:buChar char="•"/>
             </a:pPr>
             <a:r>
               <a:rPr lang="en-US" sz="1200" dirty="0">
@@ -4002,42 +5380,20 @@
                 <a:ea typeface="Arial" pitchFamily="34" charset="-122"/>
                 <a:cs typeface="Arial" pitchFamily="34" charset="-120"/>
               </a:rPr>
-              <a:t>– Project format options (pick on Day 8 or earlier): - </a:t>
-            </a:r>
-            <a:pPr algn="l" indent="0" marL="0">
-              <a:lnSpc>
-                <a:spcPts val="1680"/>
-              </a:lnSpc>
-              <a:spcBef>
-                <a:spcPts val="300"/>
-              </a:spcBef>
-              <a:spcAft>
-                <a:spcPts val="300"/>
-              </a:spcAft>
-              <a:buNone/>
-            </a:pPr>
-            <a:r>
-              <a:rPr lang="en-US" sz="1200" b="1" dirty="0">
-                <a:solidFill>
-                  <a:srgbClr val="1C2833"/>
-                </a:solidFill>
-                <a:latin typeface="Arial" pitchFamily="34" charset="0"/>
-                <a:ea typeface="Arial" pitchFamily="34" charset="-122"/>
-                <a:cs typeface="Arial" pitchFamily="34" charset="-120"/>
-              </a:rPr>
-              <a:t>Format 1: 60-second teaching video</a:t>
-            </a:r>
-            <a:pPr algn="l" indent="0" marL="0">
-              <a:lnSpc>
-                <a:spcPts val="1680"/>
-              </a:lnSpc>
-              <a:spcBef>
-                <a:spcPts val="300"/>
-              </a:spcBef>
-              <a:spcAft>
-                <a:spcPts val="300"/>
-              </a:spcAft>
-              <a:buNone/>
+              <a:t>Distribute 20-problem sheet:</a:t>
+            </a:r>
+            <a:endParaRPr lang="en-US" sz="1200" dirty="0"/>
+          </a:p>
+          <a:p>
+            <a:pPr algn="l" marL="342900" indent="-342900">
+              <a:lnSpc>
+                <a:spcPts val="1620"/>
+              </a:lnSpc>
+              <a:spcAft>
+                <a:spcPts val="300"/>
+              </a:spcAft>
+              <a:buSzPct val="100000"/>
+              <a:buChar char="•"/>
             </a:pPr>
             <a:r>
               <a:rPr lang="en-US" sz="1200" dirty="0">
@@ -4048,42 +5404,20 @@
                 <a:ea typeface="Arial" pitchFamily="34" charset="-122"/>
                 <a:cs typeface="Arial" pitchFamily="34" charset="-120"/>
               </a:rPr>
-              <a:t> for a Grade 4 audience. - </a:t>
-            </a:r>
-            <a:pPr algn="l" indent="0" marL="0">
-              <a:lnSpc>
-                <a:spcPts val="1680"/>
-              </a:lnSpc>
-              <a:spcBef>
-                <a:spcPts val="300"/>
-              </a:spcBef>
-              <a:spcAft>
-                <a:spcPts val="300"/>
-              </a:spcAft>
-              <a:buNone/>
-            </a:pPr>
-            <a:r>
-              <a:rPr lang="en-US" sz="1200" b="1" dirty="0">
-                <a:solidFill>
-                  <a:srgbClr val="1C2833"/>
-                </a:solidFill>
-                <a:latin typeface="Arial" pitchFamily="34" charset="0"/>
-                <a:ea typeface="Arial" pitchFamily="34" charset="-122"/>
-                <a:cs typeface="Arial" pitchFamily="34" charset="-120"/>
-              </a:rPr>
-              <a:t>Format 2: Printed workbook</a:t>
-            </a:r>
-            <a:pPr algn="l" indent="0" marL="0">
-              <a:lnSpc>
-                <a:spcPts val="1680"/>
-              </a:lnSpc>
-              <a:spcBef>
-                <a:spcPts val="300"/>
-              </a:spcBef>
-              <a:spcAft>
-                <a:spcPts val="300"/>
-              </a:spcAft>
-              <a:buNone/>
+              <a:t>5 problems: 2-digit × 11 (no-carry)</a:t>
+            </a:r>
+            <a:endParaRPr lang="en-US" sz="1200" dirty="0"/>
+          </a:p>
+          <a:p>
+            <a:pPr algn="l" marL="342900" indent="-342900">
+              <a:lnSpc>
+                <a:spcPts val="1620"/>
+              </a:lnSpc>
+              <a:spcAft>
+                <a:spcPts val="300"/>
+              </a:spcAft>
+              <a:buSzPct val="100000"/>
+              <a:buChar char="•"/>
             </a:pPr>
             <a:r>
               <a:rPr lang="en-US" sz="1200" dirty="0">
@@ -4094,42 +5428,20 @@
                 <a:ea typeface="Arial" pitchFamily="34" charset="-122"/>
                 <a:cs typeface="Arial" pitchFamily="34" charset="-120"/>
               </a:rPr>
-              <a:t> — 25 problems organised in difficulty levels, with worked examples and an answer key. - </a:t>
-            </a:r>
-            <a:pPr algn="l" indent="0" marL="0">
-              <a:lnSpc>
-                <a:spcPts val="1680"/>
-              </a:lnSpc>
-              <a:spcBef>
-                <a:spcPts val="300"/>
-              </a:spcBef>
-              <a:spcAft>
-                <a:spcPts val="300"/>
-              </a:spcAft>
-              <a:buNone/>
-            </a:pPr>
-            <a:r>
-              <a:rPr lang="en-US" sz="1200" b="1" dirty="0">
-                <a:solidFill>
-                  <a:srgbClr val="1C2833"/>
-                </a:solidFill>
-                <a:latin typeface="Arial" pitchFamily="34" charset="0"/>
-                <a:ea typeface="Arial" pitchFamily="34" charset="-122"/>
-                <a:cs typeface="Arial" pitchFamily="34" charset="-120"/>
-              </a:rPr>
-              <a:t>Format 3: Proof poster</a:t>
-            </a:r>
-            <a:pPr algn="l" indent="0" marL="0">
-              <a:lnSpc>
-                <a:spcPts val="1680"/>
-              </a:lnSpc>
-              <a:spcBef>
-                <a:spcPts val="300"/>
-              </a:spcBef>
-              <a:spcAft>
-                <a:spcPts val="300"/>
-              </a:spcAft>
-              <a:buNone/>
+              <a:t>5 problems: 2-digit × 11 (carry)</a:t>
+            </a:r>
+            <a:endParaRPr lang="en-US" sz="1200" dirty="0"/>
+          </a:p>
+          <a:p>
+            <a:pPr algn="l" marL="342900" indent="-342900">
+              <a:lnSpc>
+                <a:spcPts val="1620"/>
+              </a:lnSpc>
+              <a:spcAft>
+                <a:spcPts val="300"/>
+              </a:spcAft>
+              <a:buSzPct val="100000"/>
+              <a:buChar char="•"/>
             </a:pPr>
             <a:r>
               <a:rPr lang="en-US" sz="1200" dirty="0">
@@ -4140,42 +5452,20 @@
                 <a:ea typeface="Arial" pitchFamily="34" charset="-122"/>
                 <a:cs typeface="Arial" pitchFamily="34" charset="-120"/>
               </a:rPr>
-              <a:t> — one A3 sheet showing the algebraic derivation of (10</a:t>
-            </a:r>
-            <a:pPr algn="l" indent="0" marL="0">
-              <a:lnSpc>
-                <a:spcPts val="1680"/>
-              </a:lnSpc>
-              <a:spcBef>
-                <a:spcPts val="300"/>
-              </a:spcBef>
-              <a:spcAft>
-                <a:spcPts val="300"/>
-              </a:spcAft>
-              <a:buNone/>
-            </a:pPr>
-            <a:r>
-              <a:rPr lang="en-US" sz="1200" i="1" dirty="0">
-                <a:solidFill>
-                  <a:srgbClr val="1C2833"/>
-                </a:solidFill>
-                <a:latin typeface="Arial" pitchFamily="34" charset="0"/>
-                <a:ea typeface="Arial" pitchFamily="34" charset="-122"/>
-                <a:cs typeface="Arial" pitchFamily="34" charset="-120"/>
-              </a:rPr>
-              <a:t>a</a:t>
-            </a:r>
-            <a:pPr algn="l" indent="0" marL="0">
-              <a:lnSpc>
-                <a:spcPts val="1680"/>
-              </a:lnSpc>
-              <a:spcBef>
-                <a:spcPts val="300"/>
-              </a:spcBef>
-              <a:spcAft>
-                <a:spcPts val="300"/>
-              </a:spcAft>
-              <a:buNone/>
+              <a:t>5 problems: 3-digit × 11</a:t>
+            </a:r>
+            <a:endParaRPr lang="en-US" sz="1200" dirty="0"/>
+          </a:p>
+          <a:p>
+            <a:pPr algn="l" marL="342900" indent="-342900">
+              <a:lnSpc>
+                <a:spcPts val="1620"/>
+              </a:lnSpc>
+              <a:spcAft>
+                <a:spcPts val="300"/>
+              </a:spcAft>
+              <a:buSzPct val="100000"/>
+              <a:buChar char="•"/>
             </a:pPr>
             <a:r>
               <a:rPr lang="en-US" sz="1200" dirty="0">
@@ -4186,237 +5476,7 @@
                 <a:ea typeface="Arial" pitchFamily="34" charset="-122"/>
                 <a:cs typeface="Arial" pitchFamily="34" charset="-120"/>
               </a:rPr>
-              <a:t> + </a:t>
-            </a:r>
-            <a:pPr algn="l" indent="0" marL="0">
-              <a:lnSpc>
-                <a:spcPts val="1680"/>
-              </a:lnSpc>
-              <a:spcBef>
-                <a:spcPts val="300"/>
-              </a:spcBef>
-              <a:spcAft>
-                <a:spcPts val="300"/>
-              </a:spcAft>
-              <a:buNone/>
-            </a:pPr>
-            <a:r>
-              <a:rPr lang="en-US" sz="1200" i="1" dirty="0">
-                <a:solidFill>
-                  <a:srgbClr val="1C2833"/>
-                </a:solidFill>
-                <a:latin typeface="Arial" pitchFamily="34" charset="0"/>
-                <a:ea typeface="Arial" pitchFamily="34" charset="-122"/>
-                <a:cs typeface="Arial" pitchFamily="34" charset="-120"/>
-              </a:rPr>
-              <a:t>b</a:t>
-            </a:r>
-            <a:pPr algn="l" indent="0" marL="0">
-              <a:lnSpc>
-                <a:spcPts val="1680"/>
-              </a:lnSpc>
-              <a:spcBef>
-                <a:spcPts val="300"/>
-              </a:spcBef>
-              <a:spcAft>
-                <a:spcPts val="300"/>
-              </a:spcAft>
-              <a:buNone/>
-            </a:pPr>
-            <a:r>
-              <a:rPr lang="en-US" sz="1200" dirty="0">
-                <a:solidFill>
-                  <a:srgbClr val="1C2833"/>
-                </a:solidFill>
-                <a:latin typeface="Arial" pitchFamily="34" charset="0"/>
-                <a:ea typeface="Arial" pitchFamily="34" charset="-122"/>
-                <a:cs typeface="Arial" pitchFamily="34" charset="-120"/>
-              </a:rPr>
-              <a:t>) × 11 = 100</a:t>
-            </a:r>
-            <a:pPr algn="l" indent="0" marL="0">
-              <a:lnSpc>
-                <a:spcPts val="1680"/>
-              </a:lnSpc>
-              <a:spcBef>
-                <a:spcPts val="300"/>
-              </a:spcBef>
-              <a:spcAft>
-                <a:spcPts val="300"/>
-              </a:spcAft>
-              <a:buNone/>
-            </a:pPr>
-            <a:r>
-              <a:rPr lang="en-US" sz="1200" i="1" dirty="0">
-                <a:solidFill>
-                  <a:srgbClr val="1C2833"/>
-                </a:solidFill>
-                <a:latin typeface="Arial" pitchFamily="34" charset="0"/>
-                <a:ea typeface="Arial" pitchFamily="34" charset="-122"/>
-                <a:cs typeface="Arial" pitchFamily="34" charset="-120"/>
-              </a:rPr>
-              <a:t>a</a:t>
-            </a:r>
-            <a:pPr algn="l" indent="0" marL="0">
-              <a:lnSpc>
-                <a:spcPts val="1680"/>
-              </a:lnSpc>
-              <a:spcBef>
-                <a:spcPts val="300"/>
-              </a:spcBef>
-              <a:spcAft>
-                <a:spcPts val="300"/>
-              </a:spcAft>
-              <a:buNone/>
-            </a:pPr>
-            <a:r>
-              <a:rPr lang="en-US" sz="1200" dirty="0">
-                <a:solidFill>
-                  <a:srgbClr val="1C2833"/>
-                </a:solidFill>
-                <a:latin typeface="Arial" pitchFamily="34" charset="0"/>
-                <a:ea typeface="Arial" pitchFamily="34" charset="-122"/>
-                <a:cs typeface="Arial" pitchFamily="34" charset="-120"/>
-              </a:rPr>
-              <a:t> + 10(</a:t>
-            </a:r>
-            <a:pPr algn="l" indent="0" marL="0">
-              <a:lnSpc>
-                <a:spcPts val="1680"/>
-              </a:lnSpc>
-              <a:spcBef>
-                <a:spcPts val="300"/>
-              </a:spcBef>
-              <a:spcAft>
-                <a:spcPts val="300"/>
-              </a:spcAft>
-              <a:buNone/>
-            </a:pPr>
-            <a:r>
-              <a:rPr lang="en-US" sz="1200" i="1" dirty="0">
-                <a:solidFill>
-                  <a:srgbClr val="1C2833"/>
-                </a:solidFill>
-                <a:latin typeface="Arial" pitchFamily="34" charset="0"/>
-                <a:ea typeface="Arial" pitchFamily="34" charset="-122"/>
-                <a:cs typeface="Arial" pitchFamily="34" charset="-120"/>
-              </a:rPr>
-              <a:t>a</a:t>
-            </a:r>
-            <a:pPr algn="l" indent="0" marL="0">
-              <a:lnSpc>
-                <a:spcPts val="1680"/>
-              </a:lnSpc>
-              <a:spcBef>
-                <a:spcPts val="300"/>
-              </a:spcBef>
-              <a:spcAft>
-                <a:spcPts val="300"/>
-              </a:spcAft>
-              <a:buNone/>
-            </a:pPr>
-            <a:r>
-              <a:rPr lang="en-US" sz="1200" dirty="0">
-                <a:solidFill>
-                  <a:srgbClr val="1C2833"/>
-                </a:solidFill>
-                <a:latin typeface="Arial" pitchFamily="34" charset="0"/>
-                <a:ea typeface="Arial" pitchFamily="34" charset="-122"/>
-                <a:cs typeface="Arial" pitchFamily="34" charset="-120"/>
-              </a:rPr>
-              <a:t>+</a:t>
-            </a:r>
-            <a:pPr algn="l" indent="0" marL="0">
-              <a:lnSpc>
-                <a:spcPts val="1680"/>
-              </a:lnSpc>
-              <a:spcBef>
-                <a:spcPts val="300"/>
-              </a:spcBef>
-              <a:spcAft>
-                <a:spcPts val="300"/>
-              </a:spcAft>
-              <a:buNone/>
-            </a:pPr>
-            <a:r>
-              <a:rPr lang="en-US" sz="1200" i="1" dirty="0">
-                <a:solidFill>
-                  <a:srgbClr val="1C2833"/>
-                </a:solidFill>
-                <a:latin typeface="Arial" pitchFamily="34" charset="0"/>
-                <a:ea typeface="Arial" pitchFamily="34" charset="-122"/>
-                <a:cs typeface="Arial" pitchFamily="34" charset="-120"/>
-              </a:rPr>
-              <a:t>b</a:t>
-            </a:r>
-            <a:pPr algn="l" indent="0" marL="0">
-              <a:lnSpc>
-                <a:spcPts val="1680"/>
-              </a:lnSpc>
-              <a:spcBef>
-                <a:spcPts val="300"/>
-              </a:spcBef>
-              <a:spcAft>
-                <a:spcPts val="300"/>
-              </a:spcAft>
-              <a:buNone/>
-            </a:pPr>
-            <a:r>
-              <a:rPr lang="en-US" sz="1200" dirty="0">
-                <a:solidFill>
-                  <a:srgbClr val="1C2833"/>
-                </a:solidFill>
-                <a:latin typeface="Arial" pitchFamily="34" charset="0"/>
-                <a:ea typeface="Arial" pitchFamily="34" charset="-122"/>
-                <a:cs typeface="Arial" pitchFamily="34" charset="-120"/>
-              </a:rPr>
-              <a:t>) + </a:t>
-            </a:r>
-            <a:pPr algn="l" indent="0" marL="0">
-              <a:lnSpc>
-                <a:spcPts val="1680"/>
-              </a:lnSpc>
-              <a:spcBef>
-                <a:spcPts val="300"/>
-              </a:spcBef>
-              <a:spcAft>
-                <a:spcPts val="300"/>
-              </a:spcAft>
-              <a:buNone/>
-            </a:pPr>
-            <a:r>
-              <a:rPr lang="en-US" sz="1200" i="1" dirty="0">
-                <a:solidFill>
-                  <a:srgbClr val="1C2833"/>
-                </a:solidFill>
-                <a:latin typeface="Arial" pitchFamily="34" charset="0"/>
-                <a:ea typeface="Arial" pitchFamily="34" charset="-122"/>
-                <a:cs typeface="Arial" pitchFamily="34" charset="-120"/>
-              </a:rPr>
-              <a:t>b</a:t>
-            </a:r>
-            <a:pPr algn="l" indent="0" marL="0">
-              <a:lnSpc>
-                <a:spcPts val="1680"/>
-              </a:lnSpc>
-              <a:spcBef>
-                <a:spcPts val="300"/>
-              </a:spcBef>
-              <a:spcAft>
-                <a:spcPts val="300"/>
-              </a:spcAft>
-              <a:buNone/>
-            </a:pPr>
-            <a:r>
-              <a:rPr lang="en-US" sz="1200" dirty="0">
-                <a:solidFill>
-                  <a:srgbClr val="1C2833"/>
-                </a:solidFill>
-                <a:latin typeface="Arial" pitchFamily="34" charset="0"/>
-                <a:ea typeface="Arial" pitchFamily="34" charset="-122"/>
-                <a:cs typeface="Arial" pitchFamily="34" charset="-120"/>
-              </a:rPr>
-              <a:t> with examples and a 3-line explanation.</a:t>
+              <a:t>5 problems: 2-digit × 12 through ×19</a:t>
             </a:r>
             <a:endParaRPr lang="en-US" sz="1200" dirty="0"/>
           </a:p>
@@ -4425,150 +5485,6 @@
       <p:sp>
         <p:nvSpPr>
           <p:cNvPr id="5" name="Text 3"/>
-          <p:cNvSpPr/>
-          <p:nvPr/>
-        </p:nvSpPr>
-        <p:spPr>
-          <a:xfrm>
-            <a:off x="406301" y="1800225"/>
-            <a:ext cx="8498026" cy="213271"/>
-          </a:xfrm>
-          <a:prstGeom prst="rect">
-            <a:avLst/>
-          </a:prstGeom>
-          <a:noFill/>
-          <a:ln/>
-        </p:spPr>
-        <p:txBody>
-          <a:bodyPr wrap="square" lIns="0" tIns="0" rIns="0" bIns="0" rtlCol="0" anchor="t"/>
-          <a:lstStyle/>
-          <a:p>
-            <a:pPr algn="l" indent="0" marL="0">
-              <a:lnSpc>
-                <a:spcPts val="1680"/>
-              </a:lnSpc>
-              <a:spcBef>
-                <a:spcPts val="300"/>
-              </a:spcBef>
-              <a:spcAft>
-                <a:spcPts val="300"/>
-              </a:spcAft>
-              <a:buNone/>
-            </a:pPr>
-            <a:r>
-              <a:rPr lang="en-US" sz="1200" dirty="0">
-                <a:solidFill>
-                  <a:srgbClr val="1C2833"/>
-                </a:solidFill>
-                <a:latin typeface="Arial" pitchFamily="34" charset="0"/>
-                <a:ea typeface="Arial" pitchFamily="34" charset="-122"/>
-                <a:cs typeface="Arial" pitchFamily="34" charset="-120"/>
-              </a:rPr>
-              <a:t>– Each pair shows the teacher their plan in the first 5 min. Teacher signs off or redirects.</a:t>
-            </a:r>
-            <a:endParaRPr lang="en-US" sz="1200" dirty="0"/>
-          </a:p>
-        </p:txBody>
-      </p:sp>
-      <p:sp>
-        <p:nvSpPr>
-          <p:cNvPr id="6" name="Text 4"/>
-          <p:cNvSpPr/>
-          <p:nvPr/>
-        </p:nvSpPr>
-        <p:spPr>
-          <a:xfrm>
-            <a:off x="406301" y="2089696"/>
-            <a:ext cx="8498026" cy="426541"/>
-          </a:xfrm>
-          <a:prstGeom prst="rect">
-            <a:avLst/>
-          </a:prstGeom>
-          <a:noFill/>
-          <a:ln/>
-        </p:spPr>
-        <p:txBody>
-          <a:bodyPr wrap="square" lIns="0" tIns="0" rIns="0" bIns="0" rtlCol="0" anchor="t"/>
-          <a:lstStyle/>
-          <a:p>
-            <a:pPr algn="l" indent="0" marL="0">
-              <a:lnSpc>
-                <a:spcPts val="1680"/>
-              </a:lnSpc>
-              <a:spcBef>
-                <a:spcPts val="300"/>
-              </a:spcBef>
-              <a:spcAft>
-                <a:spcPts val="300"/>
-              </a:spcAft>
-              <a:buNone/>
-            </a:pPr>
-            <a:r>
-              <a:rPr lang="en-US" sz="1200" dirty="0">
-                <a:solidFill>
-                  <a:srgbClr val="1C2833"/>
-                </a:solidFill>
-                <a:latin typeface="Arial" pitchFamily="34" charset="0"/>
-                <a:ea typeface="Arial" pitchFamily="34" charset="-122"/>
-                <a:cs typeface="Arial" pitchFamily="34" charset="-120"/>
-              </a:rPr>
-              <a:t>– Work time. Teacher circulates:   – Check video pairs have a quiet recording space.   – Check workbook pairs have grid paper.   – Check poster pairs have A3 sheets and at least 2 markers.</a:t>
-            </a:r>
-            <a:endParaRPr lang="en-US" sz="1200" dirty="0"/>
-          </a:p>
-        </p:txBody>
-      </p:sp>
-      <p:sp>
-        <p:nvSpPr>
-          <p:cNvPr id="7" name="Text 5"/>
-          <p:cNvSpPr/>
-          <p:nvPr/>
-        </p:nvSpPr>
-        <p:spPr>
-          <a:xfrm>
-            <a:off x="406301" y="2592437"/>
-            <a:ext cx="8498026" cy="213271"/>
-          </a:xfrm>
-          <a:prstGeom prst="rect">
-            <a:avLst/>
-          </a:prstGeom>
-          <a:noFill/>
-          <a:ln/>
-        </p:spPr>
-        <p:txBody>
-          <a:bodyPr wrap="square" lIns="0" tIns="0" rIns="0" bIns="0" rtlCol="0" anchor="t"/>
-          <a:lstStyle/>
-          <a:p>
-            <a:pPr algn="l" indent="0" marL="0">
-              <a:lnSpc>
-                <a:spcPts val="1680"/>
-              </a:lnSpc>
-              <a:spcBef>
-                <a:spcPts val="300"/>
-              </a:spcBef>
-              <a:spcAft>
-                <a:spcPts val="300"/>
-              </a:spcAft>
-              <a:buNone/>
-            </a:pPr>
-            <a:r>
-              <a:rPr lang="en-US" sz="1200" dirty="0">
-                <a:solidFill>
-                  <a:srgbClr val="1C2833"/>
-                </a:solidFill>
-                <a:latin typeface="Arial" pitchFamily="34" charset="0"/>
-                <a:ea typeface="Arial" pitchFamily="34" charset="-122"/>
-                <a:cs typeface="Arial" pitchFamily="34" charset="-120"/>
-              </a:rPr>
-              <a:t>– Final 5 min: each pair shares their working title and ONE thing they're stuck on. Class offers one suggestion.</a:t>
-            </a:r>
-            <a:endParaRPr lang="en-US" sz="1200" dirty="0"/>
-          </a:p>
-        </p:txBody>
-      </p:sp>
-      <p:sp>
-        <p:nvSpPr>
-          <p:cNvPr id="8" name="Text 6"/>
           <p:cNvSpPr/>
           <p:nvPr/>
         </p:nvSpPr>
@@ -4718,7 +5634,7 @@
                 <a:ea typeface="Georgia" pitchFamily="34" charset="-122"/>
                 <a:cs typeface="Georgia" pitchFamily="34" charset="-120"/>
               </a:rPr>
-              <a:t>Wrap-up (2 min)</a:t>
+              <a:t>Mixed-practice drill (12 min) (cont.)</a:t>
             </a:r>
             <a:endParaRPr lang="en-US" sz="1800" dirty="0"/>
           </a:p>
@@ -4733,7 +5649,7 @@
         <p:spPr>
           <a:xfrm>
             <a:off x="634901" y="883593"/>
-            <a:ext cx="8102798" cy="281880"/>
+            <a:ext cx="8102798" cy="525661"/>
           </a:xfrm>
           <a:prstGeom prst="rect">
             <a:avLst/>
@@ -4756,15 +5672,39 @@
               <a:buChar char="•"/>
             </a:pPr>
             <a:r>
-              <a:rPr lang="en-US" sz="1200" i="1" dirty="0">
-                <a:solidFill>
-                  <a:srgbClr val="1C2833"/>
-                </a:solidFill>
-                <a:latin typeface="Arial" pitchFamily="34" charset="0"/>
-                <a:ea typeface="Arial" pitchFamily="34" charset="-122"/>
-                <a:cs typeface="Arial" pitchFamily="34" charset="-120"/>
-              </a:rPr>
-              <a:t>"Tomorrow is the final assessment and project share. Bring your finished artefact. Polish, don't restart."</a:t>
+              <a:rPr lang="en-US" sz="1200" dirty="0">
+                <a:solidFill>
+                  <a:srgbClr val="1C2833"/>
+                </a:solidFill>
+                <a:latin typeface="Arial" pitchFamily="34" charset="0"/>
+                <a:ea typeface="Arial" pitchFamily="34" charset="-122"/>
+                <a:cs typeface="Arial" pitchFamily="34" charset="-120"/>
+              </a:rPr>
+              <a:t>Solo, untimed, but aim to finish in 10 min.</a:t>
+            </a:r>
+            <a:endParaRPr lang="en-US" sz="1200" dirty="0"/>
+          </a:p>
+          <a:p>
+            <a:pPr algn="l" marL="342900" indent="-342900">
+              <a:lnSpc>
+                <a:spcPts val="1620"/>
+              </a:lnSpc>
+              <a:spcAft>
+                <a:spcPts val="300"/>
+              </a:spcAft>
+              <a:buSzPct val="100000"/>
+              <a:buChar char="•"/>
+            </a:pPr>
+            <a:r>
+              <a:rPr lang="en-US" sz="1200" dirty="0">
+                <a:solidFill>
+                  <a:srgbClr val="1C2833"/>
+                </a:solidFill>
+                <a:latin typeface="Arial" pitchFamily="34" charset="0"/>
+                <a:ea typeface="Arial" pitchFamily="34" charset="-122"/>
+                <a:cs typeface="Arial" pitchFamily="34" charset="-120"/>
+              </a:rPr>
+              <a:t>2 min: pair-swap, peer-check three problems each.</a:t>
             </a:r>
             <a:endParaRPr lang="en-US" sz="1200" dirty="0"/>
           </a:p>
@@ -4922,7 +5862,7 @@
                 <a:ea typeface="Georgia" pitchFamily="34" charset="-122"/>
                 <a:cs typeface="Georgia" pitchFamily="34" charset="-120"/>
               </a:rPr>
-              <a:t>Student-facing content</a:t>
+              <a:t>Project session (28 min)</a:t>
             </a:r>
             <a:endParaRPr lang="en-US" sz="1800" dirty="0"/>
           </a:p>
@@ -4936,61 +5876,8 @@
         </p:nvSpPr>
         <p:spPr>
           <a:xfrm>
-            <a:off x="406301" y="883593"/>
-            <a:ext cx="8331398" cy="1381125"/>
-          </a:xfrm>
-          <a:prstGeom prst="rect">
-            <a:avLst/>
-          </a:prstGeom>
-          <a:solidFill>
-            <a:srgbClr val="F4F8F9"/>
-          </a:solidFill>
-          <a:ln/>
-        </p:spPr>
-        <p:txBody>
-          <a:bodyPr wrap="square" rtlCol="0" anchor="ctr"/>
-          <a:lstStyle/>
-          <a:p>
-            <a:pPr indent="0" marL="0">
-              <a:buNone/>
-            </a:pPr>
-            <a:endParaRPr lang="en-US" dirty="0"/>
-          </a:p>
-        </p:txBody>
-      </p:sp>
-      <p:sp>
-        <p:nvSpPr>
-          <p:cNvPr id="5" name="Shape 3"/>
-          <p:cNvSpPr/>
-          <p:nvPr/>
-        </p:nvSpPr>
-        <p:spPr>
-          <a:xfrm>
-            <a:off x="434876" y="883593"/>
-            <a:ext cx="0" cy="1381125"/>
-          </a:xfrm>
-          <a:prstGeom prst="line">
-            <a:avLst/>
-          </a:prstGeom>
-          <a:noFill/>
-          <a:ln w="57150">
-            <a:solidFill>
-              <a:srgbClr val="FE4447"/>
-            </a:solidFill>
-            <a:prstDash val="solid"/>
-          </a:ln>
-        </p:spPr>
-      </p:sp>
-      <p:sp>
-        <p:nvSpPr>
-          <p:cNvPr id="6" name="Text 4"/>
-          <p:cNvSpPr/>
-          <p:nvPr/>
-        </p:nvSpPr>
-        <p:spPr>
-          <a:xfrm>
-            <a:off x="692051" y="1074093"/>
-            <a:ext cx="7973389" cy="230981"/>
+            <a:off x="634901" y="883593"/>
+            <a:ext cx="8102798" cy="1218902"/>
           </a:xfrm>
           <a:prstGeom prst="rect">
             <a:avLst/>
@@ -5002,247 +5889,406 @@
           <a:bodyPr wrap="square" lIns="0" tIns="0" rIns="0" bIns="0" rtlCol="0" anchor="t"/>
           <a:lstStyle/>
           <a:p>
+            <a:pPr algn="l" marL="342900" indent="-342900">
+              <a:lnSpc>
+                <a:spcPts val="1620"/>
+              </a:lnSpc>
+              <a:spcAft>
+                <a:spcPts val="300"/>
+              </a:spcAft>
+              <a:buSzPct val="100000"/>
+              <a:buChar char="•"/>
+            </a:pPr>
+            <a:r>
+              <a:rPr lang="en-US" sz="1200" dirty="0">
+                <a:solidFill>
+                  <a:srgbClr val="1C2833"/>
+                </a:solidFill>
+                <a:latin typeface="Arial" pitchFamily="34" charset="0"/>
+                <a:ea typeface="Arial" pitchFamily="34" charset="-122"/>
+                <a:cs typeface="Arial" pitchFamily="34" charset="-120"/>
+              </a:rPr>
+              <a:t>Project format options (pick on Day 8 or earlier):</a:t>
+            </a:r>
+            <a:endParaRPr lang="en-US" sz="1200" dirty="0"/>
+          </a:p>
+          <a:p>
+            <a:pPr algn="l" marL="342900" indent="-342900">
+              <a:lnSpc>
+                <a:spcPts val="1620"/>
+              </a:lnSpc>
+              <a:spcAft>
+                <a:spcPts val="300"/>
+              </a:spcAft>
+              <a:buSzPct val="100000"/>
+              <a:buChar char="•"/>
+            </a:pPr>
+            <a:r>
+              <a:rPr lang="en-US" sz="1200" b="1" dirty="0">
+                <a:solidFill>
+                  <a:srgbClr val="1C2833"/>
+                </a:solidFill>
+                <a:latin typeface="Arial" pitchFamily="34" charset="0"/>
+                <a:ea typeface="Arial" pitchFamily="34" charset="-122"/>
+                <a:cs typeface="Arial" pitchFamily="34" charset="-120"/>
+              </a:rPr>
+              <a:t>Format 1: 60-second teaching video</a:t>
+            </a:r>
             <a:pPr algn="l" indent="0" marL="0">
               <a:lnSpc>
-                <a:spcPts val="1820"/>
-              </a:lnSpc>
-              <a:spcBef>
-                <a:spcPts val="300"/>
-              </a:spcBef>
-              <a:spcAft>
-                <a:spcPts val="300"/>
-              </a:spcAft>
-              <a:buNone/>
-            </a:pPr>
-            <a:r>
-              <a:rPr lang="en-US" sz="1300" b="1" i="1" dirty="0">
-                <a:solidFill>
-                  <a:srgbClr val="1C2833"/>
-                </a:solidFill>
-                <a:latin typeface="Georgia" pitchFamily="34" charset="0"/>
-                <a:ea typeface="Georgia" pitchFamily="34" charset="-122"/>
-                <a:cs typeface="Georgia" pitchFamily="34" charset="-120"/>
-              </a:rPr>
-              <a:t>Today's two jobs</a:t>
-            </a:r>
-            <a:endParaRPr lang="en-US" sz="1300" dirty="0"/>
-          </a:p>
-        </p:txBody>
-      </p:sp>
-      <p:sp>
-        <p:nvSpPr>
-          <p:cNvPr id="7" name="Text 5"/>
-          <p:cNvSpPr/>
-          <p:nvPr/>
-        </p:nvSpPr>
-        <p:spPr>
-          <a:xfrm>
-            <a:off x="692051" y="1343174"/>
-            <a:ext cx="7973389" cy="461963"/>
-          </a:xfrm>
-          <a:prstGeom prst="rect">
-            <a:avLst/>
-          </a:prstGeom>
-          <a:noFill/>
-          <a:ln/>
-        </p:spPr>
-        <p:txBody>
-          <a:bodyPr wrap="square" lIns="0" tIns="0" rIns="0" bIns="0" rtlCol="0" anchor="t"/>
-          <a:lstStyle/>
-          <a:p>
+                <a:spcPts val="1620"/>
+              </a:lnSpc>
+              <a:spcAft>
+                <a:spcPts val="300"/>
+              </a:spcAft>
+              <a:buNone/>
+            </a:pPr>
+            <a:r>
+              <a:rPr lang="en-US" sz="1200" dirty="0">
+                <a:solidFill>
+                  <a:srgbClr val="1C2833"/>
+                </a:solidFill>
+                <a:latin typeface="Arial" pitchFamily="34" charset="0"/>
+                <a:ea typeface="Arial" pitchFamily="34" charset="-122"/>
+                <a:cs typeface="Arial" pitchFamily="34" charset="-120"/>
+              </a:rPr>
+              <a:t> for a Grade 4 audience.</a:t>
+            </a:r>
+            <a:endParaRPr lang="en-US" sz="1200" dirty="0"/>
+          </a:p>
+          <a:p>
+            <a:pPr algn="l" marL="342900" indent="-342900">
+              <a:lnSpc>
+                <a:spcPts val="1620"/>
+              </a:lnSpc>
+              <a:spcAft>
+                <a:spcPts val="300"/>
+              </a:spcAft>
+              <a:buSzPct val="100000"/>
+              <a:buChar char="•"/>
+            </a:pPr>
+            <a:r>
+              <a:rPr lang="en-US" sz="1200" b="1" dirty="0">
+                <a:solidFill>
+                  <a:srgbClr val="1C2833"/>
+                </a:solidFill>
+                <a:latin typeface="Arial" pitchFamily="34" charset="0"/>
+                <a:ea typeface="Arial" pitchFamily="34" charset="-122"/>
+                <a:cs typeface="Arial" pitchFamily="34" charset="-120"/>
+              </a:rPr>
+              <a:t>Format 2: Printed workbook</a:t>
+            </a:r>
             <a:pPr algn="l" indent="0" marL="0">
               <a:lnSpc>
-                <a:spcPts val="1820"/>
-              </a:lnSpc>
-              <a:spcBef>
-                <a:spcPts val="300"/>
-              </a:spcBef>
-              <a:spcAft>
-                <a:spcPts val="300"/>
-              </a:spcAft>
-              <a:buNone/>
-            </a:pPr>
-            <a:r>
-              <a:rPr lang="en-US" sz="1300" dirty="0">
-                <a:solidFill>
-                  <a:srgbClr val="1C2833"/>
-                </a:solidFill>
-                <a:latin typeface="Georgia" pitchFamily="34" charset="0"/>
-                <a:ea typeface="Georgia" pitchFamily="34" charset="-122"/>
-                <a:cs typeface="Georgia" pitchFamily="34" charset="-120"/>
-              </a:rPr>
-              <a:t>1. </a:t>
+                <a:spcPts val="1620"/>
+              </a:lnSpc>
+              <a:spcAft>
+                <a:spcPts val="300"/>
+              </a:spcAft>
+              <a:buNone/>
+            </a:pPr>
+            <a:r>
+              <a:rPr lang="en-US" sz="1200" dirty="0">
+                <a:solidFill>
+                  <a:srgbClr val="1C2833"/>
+                </a:solidFill>
+                <a:latin typeface="Arial" pitchFamily="34" charset="0"/>
+                <a:ea typeface="Arial" pitchFamily="34" charset="-122"/>
+                <a:cs typeface="Arial" pitchFamily="34" charset="-120"/>
+              </a:rPr>
+              <a:t> — 25 problems organised in difficulty levels, with worked examples and an answer key.</a:t>
+            </a:r>
+            <a:endParaRPr lang="en-US" sz="1200" dirty="0"/>
+          </a:p>
+          <a:p>
+            <a:pPr algn="l" marL="342900" indent="-342900">
+              <a:lnSpc>
+                <a:spcPts val="1620"/>
+              </a:lnSpc>
+              <a:spcAft>
+                <a:spcPts val="300"/>
+              </a:spcAft>
+              <a:buSzPct val="100000"/>
+              <a:buChar char="•"/>
+            </a:pPr>
+            <a:r>
+              <a:rPr lang="en-US" sz="1200" b="1" dirty="0">
+                <a:solidFill>
+                  <a:srgbClr val="1C2833"/>
+                </a:solidFill>
+                <a:latin typeface="Arial" pitchFamily="34" charset="0"/>
+                <a:ea typeface="Arial" pitchFamily="34" charset="-122"/>
+                <a:cs typeface="Arial" pitchFamily="34" charset="-120"/>
+              </a:rPr>
+              <a:t>Format 3: Proof poster</a:t>
             </a:r>
             <a:pPr algn="l" indent="0" marL="0">
               <a:lnSpc>
-                <a:spcPts val="1820"/>
-              </a:lnSpc>
-              <a:spcBef>
-                <a:spcPts val="300"/>
-              </a:spcBef>
-              <a:spcAft>
-                <a:spcPts val="300"/>
-              </a:spcAft>
-              <a:buNone/>
-            </a:pPr>
-            <a:r>
-              <a:rPr lang="en-US" sz="1300" b="1" i="1" dirty="0">
-                <a:solidFill>
-                  <a:srgbClr val="1C2833"/>
-                </a:solidFill>
-                <a:latin typeface="Georgia" pitchFamily="34" charset="0"/>
-                <a:ea typeface="Georgia" pitchFamily="34" charset="-122"/>
-                <a:cs typeface="Georgia" pitchFamily="34" charset="-120"/>
-              </a:rPr>
-              <a:t>Drill.</a:t>
+                <a:spcPts val="1620"/>
+              </a:lnSpc>
+              <a:spcAft>
+                <a:spcPts val="300"/>
+              </a:spcAft>
+              <a:buNone/>
+            </a:pPr>
+            <a:r>
+              <a:rPr lang="en-US" sz="1200" dirty="0">
+                <a:solidFill>
+                  <a:srgbClr val="1C2833"/>
+                </a:solidFill>
+                <a:latin typeface="Arial" pitchFamily="34" charset="0"/>
+                <a:ea typeface="Arial" pitchFamily="34" charset="-122"/>
+                <a:cs typeface="Arial" pitchFamily="34" charset="-120"/>
+              </a:rPr>
+              <a:t> — one A3 sheet showing the algebraic derivation of (10</a:t>
             </a:r>
             <a:pPr algn="l" indent="0" marL="0">
               <a:lnSpc>
-                <a:spcPts val="1820"/>
-              </a:lnSpc>
-              <a:spcBef>
-                <a:spcPts val="300"/>
-              </a:spcBef>
-              <a:spcAft>
-                <a:spcPts val="300"/>
-              </a:spcAft>
-              <a:buNone/>
-            </a:pPr>
-            <a:r>
-              <a:rPr lang="en-US" sz="1300" dirty="0">
-                <a:solidFill>
-                  <a:srgbClr val="1C2833"/>
-                </a:solidFill>
-                <a:latin typeface="Georgia" pitchFamily="34" charset="0"/>
-                <a:ea typeface="Georgia" pitchFamily="34" charset="-122"/>
-                <a:cs typeface="Georgia" pitchFamily="34" charset="-120"/>
-              </a:rPr>
-              <a:t> 20 mixed problems. Self-assess. 2. </a:t>
+                <a:spcPts val="1620"/>
+              </a:lnSpc>
+              <a:spcAft>
+                <a:spcPts val="300"/>
+              </a:spcAft>
+              <a:buNone/>
+            </a:pPr>
+            <a:r>
+              <a:rPr lang="en-US" sz="1200" i="1" dirty="0">
+                <a:solidFill>
+                  <a:srgbClr val="1C2833"/>
+                </a:solidFill>
+                <a:latin typeface="Arial" pitchFamily="34" charset="0"/>
+                <a:ea typeface="Arial" pitchFamily="34" charset="-122"/>
+                <a:cs typeface="Arial" pitchFamily="34" charset="-120"/>
+              </a:rPr>
+              <a:t>a</a:t>
             </a:r>
             <a:pPr algn="l" indent="0" marL="0">
               <a:lnSpc>
-                <a:spcPts val="1820"/>
-              </a:lnSpc>
-              <a:spcBef>
-                <a:spcPts val="300"/>
-              </a:spcBef>
-              <a:spcAft>
-                <a:spcPts val="300"/>
-              </a:spcAft>
-              <a:buNone/>
-            </a:pPr>
-            <a:r>
-              <a:rPr lang="en-US" sz="1300" b="1" i="1" dirty="0">
-                <a:solidFill>
-                  <a:srgbClr val="1C2833"/>
-                </a:solidFill>
-                <a:latin typeface="Georgia" pitchFamily="34" charset="0"/>
-                <a:ea typeface="Georgia" pitchFamily="34" charset="-122"/>
-                <a:cs typeface="Georgia" pitchFamily="34" charset="-120"/>
-              </a:rPr>
-              <a:t>Project work.</a:t>
+                <a:spcPts val="1620"/>
+              </a:lnSpc>
+              <a:spcAft>
+                <a:spcPts val="300"/>
+              </a:spcAft>
+              <a:buNone/>
+            </a:pPr>
+            <a:r>
+              <a:rPr lang="en-US" sz="1200" dirty="0">
+                <a:solidFill>
+                  <a:srgbClr val="1C2833"/>
+                </a:solidFill>
+                <a:latin typeface="Arial" pitchFamily="34" charset="0"/>
+                <a:ea typeface="Arial" pitchFamily="34" charset="-122"/>
+                <a:cs typeface="Arial" pitchFamily="34" charset="-120"/>
+              </a:rPr>
+              <a:t> + </a:t>
             </a:r>
             <a:pPr algn="l" indent="0" marL="0">
               <a:lnSpc>
-                <a:spcPts val="1820"/>
-              </a:lnSpc>
-              <a:spcBef>
-                <a:spcPts val="300"/>
-              </a:spcBef>
-              <a:spcAft>
-                <a:spcPts val="300"/>
-              </a:spcAft>
-              <a:buNone/>
-            </a:pPr>
-            <a:r>
-              <a:rPr lang="en-US" sz="1300" dirty="0">
-                <a:solidFill>
-                  <a:srgbClr val="1C2833"/>
-                </a:solidFill>
-                <a:latin typeface="Georgia" pitchFamily="34" charset="0"/>
-                <a:ea typeface="Georgia" pitchFamily="34" charset="-122"/>
-                <a:cs typeface="Georgia" pitchFamily="34" charset="-120"/>
-              </a:rPr>
-              <a:t> Make real progress today — by end of class you should be 70% done.</a:t>
-            </a:r>
-            <a:endParaRPr lang="en-US" sz="1300" dirty="0"/>
-          </a:p>
-        </p:txBody>
-      </p:sp>
-      <p:sp>
-        <p:nvSpPr>
-          <p:cNvPr id="8" name="Text 6"/>
-          <p:cNvSpPr/>
-          <p:nvPr/>
-        </p:nvSpPr>
-        <p:spPr>
-          <a:xfrm>
-            <a:off x="692051" y="1843236"/>
-            <a:ext cx="7973389" cy="230981"/>
-          </a:xfrm>
-          <a:prstGeom prst="rect">
-            <a:avLst/>
-          </a:prstGeom>
-          <a:noFill/>
-          <a:ln/>
-        </p:spPr>
-        <p:txBody>
-          <a:bodyPr wrap="square" lIns="0" tIns="0" rIns="0" bIns="0" rtlCol="0" anchor="t"/>
-          <a:lstStyle/>
-          <a:p>
+                <a:spcPts val="1620"/>
+              </a:lnSpc>
+              <a:spcAft>
+                <a:spcPts val="300"/>
+              </a:spcAft>
+              <a:buNone/>
+            </a:pPr>
+            <a:r>
+              <a:rPr lang="en-US" sz="1200" i="1" dirty="0">
+                <a:solidFill>
+                  <a:srgbClr val="1C2833"/>
+                </a:solidFill>
+                <a:latin typeface="Arial" pitchFamily="34" charset="0"/>
+                <a:ea typeface="Arial" pitchFamily="34" charset="-122"/>
+                <a:cs typeface="Arial" pitchFamily="34" charset="-120"/>
+              </a:rPr>
+              <a:t>b</a:t>
+            </a:r>
             <a:pPr algn="l" indent="0" marL="0">
               <a:lnSpc>
-                <a:spcPts val="1820"/>
-              </a:lnSpc>
-              <a:spcBef>
-                <a:spcPts val="300"/>
-              </a:spcBef>
-              <a:spcAft>
-                <a:spcPts val="300"/>
-              </a:spcAft>
-              <a:buNone/>
-            </a:pPr>
-            <a:r>
-              <a:rPr lang="en-US" sz="1300" b="1" i="1" dirty="0">
-                <a:solidFill>
-                  <a:srgbClr val="1C2833"/>
-                </a:solidFill>
-                <a:latin typeface="Georgia" pitchFamily="34" charset="0"/>
-                <a:ea typeface="Georgia" pitchFamily="34" charset="-122"/>
-                <a:cs typeface="Georgia" pitchFamily="34" charset="-120"/>
-              </a:rPr>
-              <a:t>Project Day 10:</a:t>
+                <a:spcPts val="1620"/>
+              </a:lnSpc>
+              <a:spcAft>
+                <a:spcPts val="300"/>
+              </a:spcAft>
+              <a:buNone/>
+            </a:pPr>
+            <a:r>
+              <a:rPr lang="en-US" sz="1200" dirty="0">
+                <a:solidFill>
+                  <a:srgbClr val="1C2833"/>
+                </a:solidFill>
+                <a:latin typeface="Arial" pitchFamily="34" charset="0"/>
+                <a:ea typeface="Arial" pitchFamily="34" charset="-122"/>
+                <a:cs typeface="Arial" pitchFamily="34" charset="-120"/>
+              </a:rPr>
+              <a:t>) × 11 = 100</a:t>
             </a:r>
             <a:pPr algn="l" indent="0" marL="0">
               <a:lnSpc>
-                <a:spcPts val="1820"/>
-              </a:lnSpc>
-              <a:spcBef>
-                <a:spcPts val="300"/>
-              </a:spcBef>
-              <a:spcAft>
-                <a:spcPts val="300"/>
-              </a:spcAft>
-              <a:buNone/>
-            </a:pPr>
-            <a:r>
-              <a:rPr lang="en-US" sz="1300" dirty="0">
-                <a:solidFill>
-                  <a:srgbClr val="1C2833"/>
-                </a:solidFill>
-                <a:latin typeface="Georgia" pitchFamily="34" charset="0"/>
-                <a:ea typeface="Georgia" pitchFamily="34" charset="-122"/>
-                <a:cs typeface="Georgia" pitchFamily="34" charset="-120"/>
-              </a:rPr>
-              <a:t> 2-minute presentation + 1-min Q&amp;A. Be ready.</a:t>
-            </a:r>
-            <a:endParaRPr lang="en-US" sz="1300" dirty="0"/>
-          </a:p>
-        </p:txBody>
-      </p:sp>
-      <p:sp>
-        <p:nvSpPr>
-          <p:cNvPr id="9" name="Text 7"/>
+                <a:spcPts val="1620"/>
+              </a:lnSpc>
+              <a:spcAft>
+                <a:spcPts val="300"/>
+              </a:spcAft>
+              <a:buNone/>
+            </a:pPr>
+            <a:r>
+              <a:rPr lang="en-US" sz="1200" i="1" dirty="0">
+                <a:solidFill>
+                  <a:srgbClr val="1C2833"/>
+                </a:solidFill>
+                <a:latin typeface="Arial" pitchFamily="34" charset="0"/>
+                <a:ea typeface="Arial" pitchFamily="34" charset="-122"/>
+                <a:cs typeface="Arial" pitchFamily="34" charset="-120"/>
+              </a:rPr>
+              <a:t>a</a:t>
+            </a:r>
+            <a:pPr algn="l" indent="0" marL="0">
+              <a:lnSpc>
+                <a:spcPts val="1620"/>
+              </a:lnSpc>
+              <a:spcAft>
+                <a:spcPts val="300"/>
+              </a:spcAft>
+              <a:buNone/>
+            </a:pPr>
+            <a:r>
+              <a:rPr lang="en-US" sz="1200" dirty="0">
+                <a:solidFill>
+                  <a:srgbClr val="1C2833"/>
+                </a:solidFill>
+                <a:latin typeface="Arial" pitchFamily="34" charset="0"/>
+                <a:ea typeface="Arial" pitchFamily="34" charset="-122"/>
+                <a:cs typeface="Arial" pitchFamily="34" charset="-120"/>
+              </a:rPr>
+              <a:t> + 10(</a:t>
+            </a:r>
+            <a:pPr algn="l" indent="0" marL="0">
+              <a:lnSpc>
+                <a:spcPts val="1620"/>
+              </a:lnSpc>
+              <a:spcAft>
+                <a:spcPts val="300"/>
+              </a:spcAft>
+              <a:buNone/>
+            </a:pPr>
+            <a:r>
+              <a:rPr lang="en-US" sz="1200" i="1" dirty="0">
+                <a:solidFill>
+                  <a:srgbClr val="1C2833"/>
+                </a:solidFill>
+                <a:latin typeface="Arial" pitchFamily="34" charset="0"/>
+                <a:ea typeface="Arial" pitchFamily="34" charset="-122"/>
+                <a:cs typeface="Arial" pitchFamily="34" charset="-120"/>
+              </a:rPr>
+              <a:t>a</a:t>
+            </a:r>
+            <a:pPr algn="l" indent="0" marL="0">
+              <a:lnSpc>
+                <a:spcPts val="1620"/>
+              </a:lnSpc>
+              <a:spcAft>
+                <a:spcPts val="300"/>
+              </a:spcAft>
+              <a:buNone/>
+            </a:pPr>
+            <a:r>
+              <a:rPr lang="en-US" sz="1200" dirty="0">
+                <a:solidFill>
+                  <a:srgbClr val="1C2833"/>
+                </a:solidFill>
+                <a:latin typeface="Arial" pitchFamily="34" charset="0"/>
+                <a:ea typeface="Arial" pitchFamily="34" charset="-122"/>
+                <a:cs typeface="Arial" pitchFamily="34" charset="-120"/>
+              </a:rPr>
+              <a:t>+</a:t>
+            </a:r>
+            <a:pPr algn="l" indent="0" marL="0">
+              <a:lnSpc>
+                <a:spcPts val="1620"/>
+              </a:lnSpc>
+              <a:spcAft>
+                <a:spcPts val="300"/>
+              </a:spcAft>
+              <a:buNone/>
+            </a:pPr>
+            <a:r>
+              <a:rPr lang="en-US" sz="1200" i="1" dirty="0">
+                <a:solidFill>
+                  <a:srgbClr val="1C2833"/>
+                </a:solidFill>
+                <a:latin typeface="Arial" pitchFamily="34" charset="0"/>
+                <a:ea typeface="Arial" pitchFamily="34" charset="-122"/>
+                <a:cs typeface="Arial" pitchFamily="34" charset="-120"/>
+              </a:rPr>
+              <a:t>b</a:t>
+            </a:r>
+            <a:pPr algn="l" indent="0" marL="0">
+              <a:lnSpc>
+                <a:spcPts val="1620"/>
+              </a:lnSpc>
+              <a:spcAft>
+                <a:spcPts val="300"/>
+              </a:spcAft>
+              <a:buNone/>
+            </a:pPr>
+            <a:r>
+              <a:rPr lang="en-US" sz="1200" dirty="0">
+                <a:solidFill>
+                  <a:srgbClr val="1C2833"/>
+                </a:solidFill>
+                <a:latin typeface="Arial" pitchFamily="34" charset="0"/>
+                <a:ea typeface="Arial" pitchFamily="34" charset="-122"/>
+                <a:cs typeface="Arial" pitchFamily="34" charset="-120"/>
+              </a:rPr>
+              <a:t>) + </a:t>
+            </a:r>
+            <a:pPr algn="l" indent="0" marL="0">
+              <a:lnSpc>
+                <a:spcPts val="1620"/>
+              </a:lnSpc>
+              <a:spcAft>
+                <a:spcPts val="300"/>
+              </a:spcAft>
+              <a:buNone/>
+            </a:pPr>
+            <a:r>
+              <a:rPr lang="en-US" sz="1200" i="1" dirty="0">
+                <a:solidFill>
+                  <a:srgbClr val="1C2833"/>
+                </a:solidFill>
+                <a:latin typeface="Arial" pitchFamily="34" charset="0"/>
+                <a:ea typeface="Arial" pitchFamily="34" charset="-122"/>
+                <a:cs typeface="Arial" pitchFamily="34" charset="-120"/>
+              </a:rPr>
+              <a:t>b</a:t>
+            </a:r>
+            <a:pPr algn="l" indent="0" marL="0">
+              <a:lnSpc>
+                <a:spcPts val="1620"/>
+              </a:lnSpc>
+              <a:spcAft>
+                <a:spcPts val="300"/>
+              </a:spcAft>
+              <a:buNone/>
+            </a:pPr>
+            <a:r>
+              <a:rPr lang="en-US" sz="1200" dirty="0">
+                <a:solidFill>
+                  <a:srgbClr val="1C2833"/>
+                </a:solidFill>
+                <a:latin typeface="Arial" pitchFamily="34" charset="0"/>
+                <a:ea typeface="Arial" pitchFamily="34" charset="-122"/>
+                <a:cs typeface="Arial" pitchFamily="34" charset="-120"/>
+              </a:rPr>
+              <a:t> with examples and a 3-line explanation.</a:t>
+            </a:r>
+            <a:endParaRPr lang="en-US" sz="1200" dirty="0"/>
+          </a:p>
+        </p:txBody>
+      </p:sp>
+      <p:sp>
+        <p:nvSpPr>
+          <p:cNvPr id="5" name="Text 3"/>
           <p:cNvSpPr/>
           <p:nvPr/>
         </p:nvSpPr>
@@ -5392,7 +6438,7 @@
                 <a:ea typeface="Georgia" pitchFamily="34" charset="-122"/>
                 <a:cs typeface="Georgia" pitchFamily="34" charset="-120"/>
               </a:rPr>
-              <a:t>Homework</a:t>
+              <a:t>Project session (28 min) (cont.)</a:t>
             </a:r>
             <a:endParaRPr lang="en-US" sz="1800" dirty="0"/>
           </a:p>
@@ -5406,8 +6452,8 @@
         </p:nvSpPr>
         <p:spPr>
           <a:xfrm>
-            <a:off x="406301" y="870942"/>
-            <a:ext cx="8498026" cy="426541"/>
+            <a:off x="634901" y="883593"/>
+            <a:ext cx="8102798" cy="281880"/>
           </a:xfrm>
           <a:prstGeom prst="rect">
             <a:avLst/>
@@ -5419,17 +6465,15 @@
           <a:bodyPr wrap="square" lIns="0" tIns="0" rIns="0" bIns="0" rtlCol="0" anchor="t"/>
           <a:lstStyle/>
           <a:p>
-            <a:pPr algn="l" indent="0" marL="0">
-              <a:lnSpc>
-                <a:spcPts val="1680"/>
-              </a:lnSpc>
-              <a:spcBef>
-                <a:spcPts val="300"/>
-              </a:spcBef>
-              <a:spcAft>
-                <a:spcPts val="300"/>
-              </a:spcAft>
-              <a:buNone/>
+            <a:pPr algn="l" marL="342900" indent="-342900">
+              <a:lnSpc>
+                <a:spcPts val="1620"/>
+              </a:lnSpc>
+              <a:spcAft>
+                <a:spcPts val="300"/>
+              </a:spcAft>
+              <a:buSzPct val="100000"/>
+              <a:buChar char="•"/>
             </a:pPr>
             <a:r>
               <a:rPr lang="en-US" sz="1200" dirty="0">
@@ -5440,42 +6484,42 @@
                 <a:ea typeface="Arial" pitchFamily="34" charset="-122"/>
                 <a:cs typeface="Arial" pitchFamily="34" charset="-120"/>
               </a:rPr>
-              <a:t>– Finish your project at home. 30 minutes max. If it's not finishable in 30 minutes, </a:t>
-            </a:r>
-            <a:pPr algn="l" indent="0" marL="0">
-              <a:lnSpc>
-                <a:spcPts val="1680"/>
-              </a:lnSpc>
-              <a:spcBef>
-                <a:spcPts val="300"/>
-              </a:spcBef>
-              <a:spcAft>
-                <a:spcPts val="300"/>
-              </a:spcAft>
-              <a:buNone/>
-            </a:pPr>
-            <a:r>
-              <a:rPr lang="en-US" sz="1200" b="1" dirty="0">
-                <a:solidFill>
-                  <a:srgbClr val="1C2833"/>
-                </a:solidFill>
-                <a:latin typeface="Arial" pitchFamily="34" charset="0"/>
-                <a:ea typeface="Arial" pitchFamily="34" charset="-122"/>
-                <a:cs typeface="Arial" pitchFamily="34" charset="-120"/>
-              </a:rPr>
-              <a:t>simplify it</a:t>
-            </a:r>
-            <a:pPr algn="l" indent="0" marL="0">
-              <a:lnSpc>
-                <a:spcPts val="1680"/>
-              </a:lnSpc>
-              <a:spcBef>
-                <a:spcPts val="300"/>
-              </a:spcBef>
-              <a:spcAft>
-                <a:spcPts val="300"/>
-              </a:spcAft>
-              <a:buNone/>
+              <a:t>Each pair shows the teacher their plan in the first 5 min. Teacher signs off or redirects.</a:t>
+            </a:r>
+            <a:endParaRPr lang="en-US" sz="1200" dirty="0"/>
+          </a:p>
+        </p:txBody>
+      </p:sp>
+      <p:sp>
+        <p:nvSpPr>
+          <p:cNvPr id="5" name="Text 3"/>
+          <p:cNvSpPr/>
+          <p:nvPr/>
+        </p:nvSpPr>
+        <p:spPr>
+          <a:xfrm>
+            <a:off x="634901" y="1266974"/>
+            <a:ext cx="8102798" cy="1013222"/>
+          </a:xfrm>
+          <a:prstGeom prst="rect">
+            <a:avLst/>
+          </a:prstGeom>
+          <a:noFill/>
+          <a:ln/>
+        </p:spPr>
+        <p:txBody>
+          <a:bodyPr wrap="square" lIns="0" tIns="0" rIns="0" bIns="0" rtlCol="0" anchor="t"/>
+          <a:lstStyle/>
+          <a:p>
+            <a:pPr algn="l" marL="342900" indent="-342900">
+              <a:lnSpc>
+                <a:spcPts val="1620"/>
+              </a:lnSpc>
+              <a:spcAft>
+                <a:spcPts val="300"/>
+              </a:spcAft>
+              <a:buSzPct val="100000"/>
+              <a:buChar char="•"/>
             </a:pPr>
             <a:r>
               <a:rPr lang="en-US" sz="1200" dirty="0">
@@ -5486,15 +6530,87 @@
                 <a:ea typeface="Arial" pitchFamily="34" charset="-122"/>
                 <a:cs typeface="Arial" pitchFamily="34" charset="-120"/>
               </a:rPr>
-              <a:t> — better a complete simple project than a half-done ambitious one.</a:t>
+              <a:t>Work time. Teacher circulates:</a:t>
             </a:r>
             <a:endParaRPr lang="en-US" sz="1200" dirty="0"/>
           </a:p>
-        </p:txBody>
-      </p:sp>
-      <p:sp>
-        <p:nvSpPr>
-          <p:cNvPr id="5" name="Text 3"/>
+          <a:p>
+            <a:pPr algn="l" marL="342900" indent="-342900">
+              <a:lnSpc>
+                <a:spcPts val="1620"/>
+              </a:lnSpc>
+              <a:spcAft>
+                <a:spcPts val="300"/>
+              </a:spcAft>
+              <a:buSzPct val="100000"/>
+              <a:buChar char="•"/>
+            </a:pPr>
+            <a:r>
+              <a:rPr lang="en-US" sz="1200" dirty="0">
+                <a:solidFill>
+                  <a:srgbClr val="1C2833"/>
+                </a:solidFill>
+                <a:latin typeface="Arial" pitchFamily="34" charset="0"/>
+                <a:ea typeface="Arial" pitchFamily="34" charset="-122"/>
+                <a:cs typeface="Arial" pitchFamily="34" charset="-120"/>
+              </a:rPr>
+              <a:t>Check video pairs have a quiet recording space.</a:t>
+            </a:r>
+            <a:endParaRPr lang="en-US" sz="1200" dirty="0"/>
+          </a:p>
+          <a:p>
+            <a:pPr algn="l" marL="342900" indent="-342900">
+              <a:lnSpc>
+                <a:spcPts val="1620"/>
+              </a:lnSpc>
+              <a:spcAft>
+                <a:spcPts val="300"/>
+              </a:spcAft>
+              <a:buSzPct val="100000"/>
+              <a:buChar char="•"/>
+            </a:pPr>
+            <a:r>
+              <a:rPr lang="en-US" sz="1200" dirty="0">
+                <a:solidFill>
+                  <a:srgbClr val="1C2833"/>
+                </a:solidFill>
+                <a:latin typeface="Arial" pitchFamily="34" charset="0"/>
+                <a:ea typeface="Arial" pitchFamily="34" charset="-122"/>
+                <a:cs typeface="Arial" pitchFamily="34" charset="-120"/>
+              </a:rPr>
+              <a:t>Check workbook pairs have grid paper.</a:t>
+            </a:r>
+            <a:endParaRPr lang="en-US" sz="1200" dirty="0"/>
+          </a:p>
+          <a:p>
+            <a:pPr algn="l" marL="342900" indent="-342900">
+              <a:lnSpc>
+                <a:spcPts val="1620"/>
+              </a:lnSpc>
+              <a:spcAft>
+                <a:spcPts val="300"/>
+              </a:spcAft>
+              <a:buSzPct val="100000"/>
+              <a:buChar char="•"/>
+            </a:pPr>
+            <a:r>
+              <a:rPr lang="en-US" sz="1200" dirty="0">
+                <a:solidFill>
+                  <a:srgbClr val="1C2833"/>
+                </a:solidFill>
+                <a:latin typeface="Arial" pitchFamily="34" charset="0"/>
+                <a:ea typeface="Arial" pitchFamily="34" charset="-122"/>
+                <a:cs typeface="Arial" pitchFamily="34" charset="-120"/>
+              </a:rPr>
+              <a:t>Check poster pairs have A3 sheets and at least 2 markers.</a:t>
+            </a:r>
+            <a:endParaRPr lang="en-US" sz="1200" dirty="0"/>
+          </a:p>
+        </p:txBody>
+      </p:sp>
+      <p:sp>
+        <p:nvSpPr>
+          <p:cNvPr id="6" name="Text 4"/>
           <p:cNvSpPr/>
           <p:nvPr/>
         </p:nvSpPr>
